--- a/docxs/project-presentation-v2.pptx
+++ b/docxs/project-presentation-v2.pptx
@@ -4,6 +4,9 @@
   <p:sldMasterIdLst>
     <p:sldMasterId id="2147483648" r:id="rId1"/>
   </p:sldMasterIdLst>
+  <p:notesMasterIdLst>
+    <p:notesMasterId r:id="rId18"/>
+  </p:notesMasterIdLst>
   <p:sldIdLst>
     <p:sldId id="256" r:id="rId2"/>
     <p:sldId id="257" r:id="rId3"/>
@@ -22,11 +25,8 @@
     <p:sldId id="270" r:id="rId16"/>
     <p:sldId id="271" r:id="rId17"/>
   </p:sldIdLst>
-  <p:notesMasterIdLst>
-    <p:notesMasterId r:id="rId18"/>
-  </p:notesMasterIdLst>
-  <p:sldSz cx="12191695" cy="6858000"/>
-  <p:notesSz cx="6858000" cy="12191695"/>
+  <p:sldSz cx="12192000" cy="6858000"/>
+  <p:notesSz cx="6858000" cy="12192000"/>
   <p:defaultTextStyle>
     <a:lvl1pPr marL="0" algn="l" defTabSz="914400" rtl="0" eaLnBrk="1" latinLnBrk="0" hangingPunct="1">
       <a:defRPr sz="1800" kern="1200">
@@ -119,7 +119,57 @@
       </a:defRPr>
     </a:lvl9pPr>
   </p:defaultTextStyle>
+  <p:extLst>
+    <p:ext uri="{EFAFB233-063F-42B5-8137-9DF3F51BA10A}">
+      <p15:sldGuideLst xmlns:p15="http://schemas.microsoft.com/office/powerpoint/2012/main"/>
+    </p:ext>
+  </p:extLst>
 </p:presentation>
+</file>
+
+<file path=ppt/changesInfos/changesInfo1.xml><?xml version="1.0" encoding="utf-8"?>
+<pc:chgInfo xmlns:a="http://schemas.openxmlformats.org/drawingml/2006/main" xmlns:r="http://schemas.openxmlformats.org/officeDocument/2006/relationships" xmlns:ac="http://schemas.microsoft.com/office/drawing/2013/main/command" xmlns:pc="http://schemas.microsoft.com/office/powerpoint/2013/main/command">
+  <pc:docChgLst>
+    <pc:chgData name="Dhrutiben Narendrabhai Patel" userId="354d2828-11fe-480a-87db-1c392d26ed10" providerId="ADAL" clId="{CFE31599-482B-49F1-B641-A74F6FC1944B}"/>
+    <pc:docChg chg="undo custSel modSld">
+      <pc:chgData name="Dhrutiben Narendrabhai Patel" userId="354d2828-11fe-480a-87db-1c392d26ed10" providerId="ADAL" clId="{CFE31599-482B-49F1-B641-A74F6FC1944B}" dt="2026-07-04T20:55:10.723" v="8" actId="14100"/>
+      <pc:docMkLst>
+        <pc:docMk/>
+      </pc:docMkLst>
+      <pc:sldChg chg="addSp delSp modSp mod">
+        <pc:chgData name="Dhrutiben Narendrabhai Patel" userId="354d2828-11fe-480a-87db-1c392d26ed10" providerId="ADAL" clId="{CFE31599-482B-49F1-B641-A74F6FC1944B}" dt="2026-07-04T20:55:10.723" v="8" actId="14100"/>
+        <pc:sldMkLst>
+          <pc:docMk/>
+          <pc:sldMk cId="0" sldId="259"/>
+        </pc:sldMkLst>
+        <pc:spChg chg="add del">
+          <ac:chgData name="Dhrutiben Narendrabhai Patel" userId="354d2828-11fe-480a-87db-1c392d26ed10" providerId="ADAL" clId="{CFE31599-482B-49F1-B641-A74F6FC1944B}" dt="2026-07-04T20:54:32.787" v="2" actId="22"/>
+          <ac:spMkLst>
+            <pc:docMk/>
+            <pc:sldMk cId="0" sldId="259"/>
+            <ac:spMk id="10" creationId="{E46FF497-B6FE-10F1-84AE-BF797AF85F88}"/>
+          </ac:spMkLst>
+        </pc:spChg>
+        <pc:picChg chg="del">
+          <ac:chgData name="Dhrutiben Narendrabhai Patel" userId="354d2828-11fe-480a-87db-1c392d26ed10" providerId="ADAL" clId="{CFE31599-482B-49F1-B641-A74F6FC1944B}" dt="2026-07-04T20:54:29.862" v="0" actId="478"/>
+          <ac:picMkLst>
+            <pc:docMk/>
+            <pc:sldMk cId="0" sldId="259"/>
+            <ac:picMk id="6" creationId="{00000000-0000-0000-0000-000000000000}"/>
+          </ac:picMkLst>
+        </pc:picChg>
+        <pc:picChg chg="add mod">
+          <ac:chgData name="Dhrutiben Narendrabhai Patel" userId="354d2828-11fe-480a-87db-1c392d26ed10" providerId="ADAL" clId="{CFE31599-482B-49F1-B641-A74F6FC1944B}" dt="2026-07-04T20:55:10.723" v="8" actId="14100"/>
+          <ac:picMkLst>
+            <pc:docMk/>
+            <pc:sldMk cId="0" sldId="259"/>
+            <ac:picMk id="12" creationId="{7C8D2087-0C22-0270-B4E7-CB2F98FFD7DA}"/>
+          </ac:picMkLst>
+        </pc:picChg>
+      </pc:sldChg>
+    </pc:docChg>
+  </pc:docChgLst>
+</pc:chgInfo>
 </file>
 
 <file path=ppt/notesMasters/notesMaster1.xml><?xml version="1.0" encoding="utf-8"?>
@@ -144,234 +194,10 @@
           <a:chExt cx="0" cy="0"/>
         </a:xfrm>
       </p:grpSpPr>
-      <p:sp>
-        <p:nvSpPr>
-          <p:cNvPr id="2" name="Header Placeholder 1"/>
-          <p:cNvSpPr>
-            <a:spLocks noGrp="1"/>
-          </p:cNvSpPr>
-          <p:nvPr>
-            <p:ph type="hdr" sz="quarter"/>
-          </p:nvPr>
-        </p:nvSpPr>
-        <p:spPr>
-          <a:xfrm>
-            <a:off x="0" y="0"/>
-            <a:ext cx="2971800" cy="458788"/>
-          </a:xfrm>
-          <a:prstGeom prst="rect">
-            <a:avLst/>
-          </a:prstGeom>
-        </p:spPr>
-        <p:txBody>
-          <a:bodyPr vert="horz" lIns="91440" tIns="45720" rIns="91440" bIns="45720" rtlCol="0"/>
-          <a:lstStyle>
-            <a:lvl1pPr algn="l">
-              <a:defRPr sz="1200"/>
-            </a:lvl1pPr>
-          </a:lstStyle>
-          <a:p>
-            <a:endParaRPr lang="en-US"/>
-          </a:p>
-        </p:txBody>
-      </p:sp>
-      <p:sp>
-        <p:nvSpPr>
-          <p:cNvPr id="3" name="Date Placeholder 2"/>
-          <p:cNvSpPr>
-            <a:spLocks noGrp="1"/>
-          </p:cNvSpPr>
-          <p:nvPr>
-            <p:ph type="dt" idx="1"/>
-          </p:nvPr>
-        </p:nvSpPr>
-        <p:spPr>
-          <a:xfrm>
-            <a:off x="3884613" y="0"/>
-            <a:ext cx="2971800" cy="458788"/>
-          </a:xfrm>
-          <a:prstGeom prst="rect">
-            <a:avLst/>
-          </a:prstGeom>
-        </p:spPr>
-        <p:txBody>
-          <a:bodyPr vert="horz" lIns="91440" tIns="45720" rIns="91440" bIns="45720" rtlCol="0"/>
-          <a:lstStyle>
-            <a:lvl1pPr algn="r">
-              <a:defRPr sz="1200"/>
-            </a:lvl1pPr>
-          </a:lstStyle>
-          <a:p>
-            <a:fld id="{5282F153-3F37-0F45-9E97-73ACFA13230C}" type="datetimeFigureOut">
-              <a:rPr lang="en-US"/>
-              <a:t>7/23/19</a:t>
-            </a:fld>
-            <a:endParaRPr lang="en-US"/>
-          </a:p>
-        </p:txBody>
-      </p:sp>
-      <p:sp>
-        <p:nvSpPr>
-          <p:cNvPr id="4" name="Slide Image Placeholder 3"/>
-          <p:cNvSpPr>
-            <a:spLocks noGrp="1" noRot="1" noChangeAspect="1"/>
-          </p:cNvSpPr>
-          <p:nvPr>
-            <p:ph type="sldImg" idx="2"/>
-          </p:nvPr>
-        </p:nvSpPr>
-        <p:spPr>
-          <a:xfrm>
-            <a:off x="685800" y="1143000"/>
-            <a:ext cx="5486400" cy="3086100"/>
-          </a:xfrm>
-          <a:prstGeom prst="rect">
-            <a:avLst/>
-          </a:prstGeom>
-          <a:noFill/>
-          <a:ln w="12700">
-            <a:solidFill>
-              <a:prstClr val="black"/>
-            </a:solidFill>
-          </a:ln>
-        </p:spPr>
-        <p:txBody>
-          <a:bodyPr vert="horz" lIns="91440" tIns="45720" rIns="91440" bIns="45720" rtlCol="0" anchor="ctr"/>
-          <a:lstStyle/>
-          <a:p>
-            <a:endParaRPr lang="en-US"/>
-          </a:p>
-        </p:txBody>
-      </p:sp>
-      <p:sp>
-        <p:nvSpPr>
-          <p:cNvPr id="5" name="Notes Placeholder 4"/>
-          <p:cNvSpPr>
-            <a:spLocks noGrp="1"/>
-          </p:cNvSpPr>
-          <p:nvPr>
-            <p:ph type="body" sz="quarter" idx="3"/>
-          </p:nvPr>
-        </p:nvSpPr>
-        <p:spPr>
-          <a:xfrm>
-            <a:off x="685800" y="4400550"/>
-            <a:ext cx="5486400" cy="3600450"/>
-          </a:xfrm>
-          <a:prstGeom prst="rect">
-            <a:avLst/>
-          </a:prstGeom>
-        </p:spPr>
-        <p:txBody>
-          <a:bodyPr vert="horz" lIns="91440" tIns="45720" rIns="91440" bIns="45720" rtlCol="0"/>
-          <a:lstStyle/>
-          <a:p>
-            <a:pPr lvl="0"/>
-            <a:r>
-              <a:rPr lang="en-US"/>
-              <a:t>Click to edit Master text styles</a:t>
-            </a:r>
-          </a:p>
-          <a:p>
-            <a:pPr lvl="1"/>
-            <a:r>
-              <a:rPr lang="en-US"/>
-              <a:t>Second level</a:t>
-            </a:r>
-          </a:p>
-          <a:p>
-            <a:pPr lvl="2"/>
-            <a:r>
-              <a:rPr lang="en-US"/>
-              <a:t>Third level</a:t>
-            </a:r>
-          </a:p>
-          <a:p>
-            <a:pPr lvl="3"/>
-            <a:r>
-              <a:rPr lang="en-US"/>
-              <a:t>Fourth level</a:t>
-            </a:r>
-          </a:p>
-          <a:p>
-            <a:pPr lvl="4"/>
-            <a:r>
-              <a:rPr lang="en-US"/>
-              <a:t>Fifth level</a:t>
-            </a:r>
-          </a:p>
-        </p:txBody>
-      </p:sp>
-      <p:sp>
-        <p:nvSpPr>
-          <p:cNvPr id="6" name="Footer Placeholder 5"/>
-          <p:cNvSpPr>
-            <a:spLocks noGrp="1"/>
-          </p:cNvSpPr>
-          <p:nvPr>
-            <p:ph type="ftr" sz="quarter" idx="4"/>
-          </p:nvPr>
-        </p:nvSpPr>
-        <p:spPr>
-          <a:xfrm>
-            <a:off x="0" y="8685213"/>
-            <a:ext cx="2971800" cy="458787"/>
-          </a:xfrm>
-          <a:prstGeom prst="rect">
-            <a:avLst/>
-          </a:prstGeom>
-        </p:spPr>
-        <p:txBody>
-          <a:bodyPr vert="horz" lIns="91440" tIns="45720" rIns="91440" bIns="45720" rtlCol="0" anchor="b"/>
-          <a:lstStyle>
-            <a:lvl1pPr algn="l">
-              <a:defRPr sz="1200"/>
-            </a:lvl1pPr>
-          </a:lstStyle>
-          <a:p>
-            <a:endParaRPr lang="en-US"/>
-          </a:p>
-        </p:txBody>
-      </p:sp>
-      <p:sp>
-        <p:nvSpPr>
-          <p:cNvPr id="7" name="Slide Number Placeholder 6"/>
-          <p:cNvSpPr>
-            <a:spLocks noGrp="1"/>
-          </p:cNvSpPr>
-          <p:nvPr>
-            <p:ph type="sldNum" sz="quarter" idx="5"/>
-          </p:nvPr>
-        </p:nvSpPr>
-        <p:spPr>
-          <a:xfrm>
-            <a:off x="3884613" y="8685213"/>
-            <a:ext cx="2971800" cy="458787"/>
-          </a:xfrm>
-          <a:prstGeom prst="rect">
-            <a:avLst/>
-          </a:prstGeom>
-        </p:spPr>
-        <p:txBody>
-          <a:bodyPr vert="horz" lIns="91440" tIns="45720" rIns="91440" bIns="45720" rtlCol="0" anchor="b"/>
-          <a:lstStyle>
-            <a:lvl1pPr algn="r">
-              <a:defRPr sz="1200"/>
-            </a:lvl1pPr>
-          </a:lstStyle>
-          <a:p>
-            <a:fld id="{CE5E9CC1-C706-0F49-92D6-E571CC5EEA8F}" type="slidenum">
-              <a:rPr lang="en-US"/>
-              <a:t>‹#›</a:t>
-            </a:fld>
-            <a:endParaRPr lang="en-US"/>
-          </a:p>
-        </p:txBody>
-      </p:sp>
     </p:spTree>
     <p:extLst>
       <p:ext uri="{BB962C8B-B14F-4D97-AF65-F5344CB8AC3E}">
-        <p14:creationId xmlns:p14="http://schemas.microsoft.com/office/powerpoint/2010/main" val="1024086991"/>
+        <p14:creationId xmlns:p14="http://schemas.microsoft.com/office/powerpoint/2010/main" val="2588566808"/>
       </p:ext>
     </p:extLst>
   </p:cSld>
@@ -515,10 +341,6 @@
           <a:bodyPr/>
           <a:lstStyle/>
           <a:p>
-            <a:r>
-              <a:rPr lang="en-US" dirty="0"/>
-              <a:t/>
-            </a:r>
             <a:endParaRPr lang="en-US" dirty="0"/>
           </a:p>
         </p:txBody>
@@ -603,10 +425,6 @@
           <a:bodyPr/>
           <a:lstStyle/>
           <a:p>
-            <a:r>
-              <a:rPr lang="en-US" dirty="0"/>
-              <a:t/>
-            </a:r>
             <a:endParaRPr lang="en-US" dirty="0"/>
           </a:p>
         </p:txBody>
@@ -691,10 +509,6 @@
           <a:bodyPr/>
           <a:lstStyle/>
           <a:p>
-            <a:r>
-              <a:rPr lang="en-US" dirty="0"/>
-              <a:t/>
-            </a:r>
             <a:endParaRPr lang="en-US" dirty="0"/>
           </a:p>
         </p:txBody>
@@ -779,10 +593,6 @@
           <a:bodyPr/>
           <a:lstStyle/>
           <a:p>
-            <a:r>
-              <a:rPr lang="en-US" dirty="0"/>
-              <a:t/>
-            </a:r>
             <a:endParaRPr lang="en-US" dirty="0"/>
           </a:p>
         </p:txBody>
@@ -867,10 +677,6 @@
           <a:bodyPr/>
           <a:lstStyle/>
           <a:p>
-            <a:r>
-              <a:rPr lang="en-US" dirty="0"/>
-              <a:t/>
-            </a:r>
             <a:endParaRPr lang="en-US" dirty="0"/>
           </a:p>
         </p:txBody>
@@ -955,10 +761,6 @@
           <a:bodyPr/>
           <a:lstStyle/>
           <a:p>
-            <a:r>
-              <a:rPr lang="en-US" dirty="0"/>
-              <a:t/>
-            </a:r>
             <a:endParaRPr lang="en-US" dirty="0"/>
           </a:p>
         </p:txBody>
@@ -1043,10 +845,6 @@
           <a:bodyPr/>
           <a:lstStyle/>
           <a:p>
-            <a:r>
-              <a:rPr lang="en-US" dirty="0"/>
-              <a:t/>
-            </a:r>
             <a:endParaRPr lang="en-US" dirty="0"/>
           </a:p>
         </p:txBody>
@@ -1131,10 +929,6 @@
           <a:bodyPr/>
           <a:lstStyle/>
           <a:p>
-            <a:r>
-              <a:rPr lang="en-US" dirty="0"/>
-              <a:t/>
-            </a:r>
             <a:endParaRPr lang="en-US" dirty="0"/>
           </a:p>
         </p:txBody>
@@ -1219,10 +1013,6 @@
           <a:bodyPr/>
           <a:lstStyle/>
           <a:p>
-            <a:r>
-              <a:rPr lang="en-US" dirty="0"/>
-              <a:t/>
-            </a:r>
             <a:endParaRPr lang="en-US" dirty="0"/>
           </a:p>
         </p:txBody>
@@ -1307,10 +1097,6 @@
           <a:bodyPr/>
           <a:lstStyle/>
           <a:p>
-            <a:r>
-              <a:rPr lang="en-US" dirty="0"/>
-              <a:t/>
-            </a:r>
             <a:endParaRPr lang="en-US" dirty="0"/>
           </a:p>
         </p:txBody>
@@ -1395,10 +1181,6 @@
           <a:bodyPr/>
           <a:lstStyle/>
           <a:p>
-            <a:r>
-              <a:rPr lang="en-US" dirty="0"/>
-              <a:t/>
-            </a:r>
             <a:endParaRPr lang="en-US" dirty="0"/>
           </a:p>
         </p:txBody>
@@ -1483,10 +1265,6 @@
           <a:bodyPr/>
           <a:lstStyle/>
           <a:p>
-            <a:r>
-              <a:rPr lang="en-US" dirty="0"/>
-              <a:t/>
-            </a:r>
             <a:endParaRPr lang="en-US" dirty="0"/>
           </a:p>
         </p:txBody>
@@ -1571,10 +1349,6 @@
           <a:bodyPr/>
           <a:lstStyle/>
           <a:p>
-            <a:r>
-              <a:rPr lang="en-US" dirty="0"/>
-              <a:t/>
-            </a:r>
             <a:endParaRPr lang="en-US" dirty="0"/>
           </a:p>
         </p:txBody>
@@ -1659,10 +1433,6 @@
           <a:bodyPr/>
           <a:lstStyle/>
           <a:p>
-            <a:r>
-              <a:rPr lang="en-US" dirty="0"/>
-              <a:t/>
-            </a:r>
             <a:endParaRPr lang="en-US" dirty="0"/>
           </a:p>
         </p:txBody>
@@ -1747,10 +1517,6 @@
           <a:bodyPr/>
           <a:lstStyle/>
           <a:p>
-            <a:r>
-              <a:rPr lang="en-US" dirty="0"/>
-              <a:t/>
-            </a:r>
             <a:endParaRPr lang="en-US" dirty="0"/>
           </a:p>
         </p:txBody>
@@ -1835,10 +1601,6 @@
           <a:bodyPr/>
           <a:lstStyle/>
           <a:p>
-            <a:r>
-              <a:rPr lang="en-US" dirty="0"/>
-              <a:t/>
-            </a:r>
             <a:endParaRPr lang="en-US" dirty="0"/>
           </a:p>
         </p:txBody>
@@ -1912,6 +1674,11 @@
 <file path=ppt/slideMasters/slideMaster1.xml><?xml version="1.0" encoding="utf-8"?>
 <p:sldMaster xmlns:a="http://schemas.openxmlformats.org/drawingml/2006/main" xmlns:r="http://schemas.openxmlformats.org/officeDocument/2006/relationships" xmlns:p="http://schemas.openxmlformats.org/presentationml/2006/main">
   <p:cSld>
+    <p:bg>
+      <p:bgRef idx="1001">
+        <a:schemeClr val="bg1"/>
+      </p:bgRef>
+    </p:bg>
     <p:spTree>
       <p:nvGrpSpPr>
         <p:cNvPr id="1" name=""/>
@@ -2194,6 +1961,7 @@
         <a:solidFill>
           <a:srgbClr val="232F3E"/>
         </a:solidFill>
+        <a:effectLst/>
       </p:bgPr>
     </p:bg>
     <p:spTree>
@@ -2251,7 +2019,7 @@
           <a:bodyPr wrap="square" rtlCol="0" anchor="ctr"/>
           <a:lstStyle/>
           <a:p>
-            <a:pPr indent="0" marL="0">
+            <a:pPr marL="0" indent="0">
               <a:buNone/>
             </a:pPr>
             <a:r>
@@ -2290,7 +2058,7 @@
           <a:bodyPr wrap="square" rtlCol="0" anchor="ctr"/>
           <a:lstStyle/>
           <a:p>
-            <a:pPr indent="0" marL="0">
+            <a:pPr marL="0" indent="0">
               <a:buNone/>
             </a:pPr>
             <a:r>
@@ -2329,7 +2097,7 @@
           <a:bodyPr wrap="square" rtlCol="0" anchor="ctr"/>
           <a:lstStyle/>
           <a:p>
-            <a:pPr indent="0" marL="0">
+            <a:pPr marL="0" indent="0">
               <a:buNone/>
             </a:pPr>
             <a:r>
@@ -2368,7 +2136,7 @@
           <a:bodyPr wrap="square" rtlCol="0" anchor="ctr"/>
           <a:lstStyle/>
           <a:p>
-            <a:pPr indent="0" marL="0">
+            <a:pPr marL="0" indent="0">
               <a:buNone/>
             </a:pPr>
             <a:r>
@@ -2407,7 +2175,7 @@
           <a:bodyPr wrap="square" rtlCol="0" anchor="ctr"/>
           <a:lstStyle/>
           <a:p>
-            <a:pPr indent="0" marL="0">
+            <a:pPr marL="0" indent="0">
               <a:buNone/>
             </a:pPr>
             <a:r>
@@ -2511,11 +2279,11 @@
           <a:bodyPr wrap="square" rtlCol="0" anchor="ctr"/>
           <a:lstStyle/>
           <a:p>
-            <a:pPr indent="0" marL="0">
-              <a:buNone/>
-            </a:pPr>
-            <a:r>
-              <a:rPr lang="en-US" sz="1200" b="1" spc="100" kern="0" dirty="0">
+            <a:pPr marL="0" indent="0">
+              <a:buNone/>
+            </a:pPr>
+            <a:r>
+              <a:rPr lang="en-US" sz="1200" b="1" kern="0" spc="100" dirty="0">
                 <a:solidFill>
                   <a:srgbClr val="FF9900"/>
                 </a:solidFill>
@@ -2550,7 +2318,7 @@
           <a:bodyPr wrap="square" rtlCol="0" anchor="ctr"/>
           <a:lstStyle/>
           <a:p>
-            <a:pPr indent="0" marL="0">
+            <a:pPr marL="0" indent="0">
               <a:buNone/>
             </a:pPr>
             <a:r>
@@ -2636,7 +2404,7 @@
           <a:bodyPr wrap="square" rtlCol="0" anchor="ctr"/>
           <a:lstStyle/>
           <a:p>
-            <a:pPr indent="0" marL="0">
+            <a:pPr marL="0" indent="0">
               <a:buNone/>
             </a:pPr>
             <a:r>
@@ -2675,7 +2443,7 @@
           <a:bodyPr wrap="square" rtlCol="0" anchor="ctr"/>
           <a:lstStyle/>
           <a:p>
-            <a:pPr indent="0" marL="0">
+            <a:pPr marL="0" indent="0">
               <a:buNone/>
             </a:pPr>
             <a:r>
@@ -2714,7 +2482,7 @@
           <a:bodyPr wrap="square" rtlCol="0" anchor="ctr"/>
           <a:lstStyle/>
           <a:p>
-            <a:pPr indent="0" marL="0">
+            <a:pPr marL="0" indent="0">
               <a:buNone/>
             </a:pPr>
             <a:r>
@@ -2753,7 +2521,7 @@
           <a:bodyPr wrap="square" rtlCol="0" anchor="ctr"/>
           <a:lstStyle/>
           <a:p>
-            <a:pPr indent="0" marL="0">
+            <a:pPr marL="0" indent="0">
               <a:buNone/>
             </a:pPr>
             <a:r>
@@ -2792,7 +2560,7 @@
           <a:bodyPr wrap="square" rtlCol="0" anchor="ctr"/>
           <a:lstStyle/>
           <a:p>
-            <a:pPr indent="0" marL="0">
+            <a:pPr marL="0" indent="0">
               <a:buNone/>
             </a:pPr>
             <a:r>
@@ -2831,7 +2599,7 @@
           <a:bodyPr wrap="square" rtlCol="0" anchor="ctr"/>
           <a:lstStyle/>
           <a:p>
-            <a:pPr indent="0" marL="0">
+            <a:pPr marL="0" indent="0">
               <a:buNone/>
             </a:pPr>
             <a:r>
@@ -2870,7 +2638,7 @@
           <a:bodyPr wrap="square" rtlCol="0" anchor="ctr"/>
           <a:lstStyle/>
           <a:p>
-            <a:pPr indent="0" marL="0">
+            <a:pPr marL="0" indent="0">
               <a:buNone/>
             </a:pPr>
             <a:r>
@@ -2909,7 +2677,7 @@
           <a:bodyPr wrap="square" rtlCol="0" anchor="ctr"/>
           <a:lstStyle/>
           <a:p>
-            <a:pPr indent="0" marL="0">
+            <a:pPr marL="0" indent="0">
               <a:buNone/>
             </a:pPr>
             <a:r>
@@ -2948,7 +2716,7 @@
           <a:bodyPr wrap="square" rtlCol="0" anchor="ctr"/>
           <a:lstStyle/>
           <a:p>
-            <a:pPr indent="0" marL="0">
+            <a:pPr marL="0" indent="0">
               <a:buNone/>
             </a:pPr>
             <a:r>
@@ -2987,7 +2755,7 @@
           <a:bodyPr wrap="square" rtlCol="0" anchor="ctr"/>
           <a:lstStyle/>
           <a:p>
-            <a:pPr indent="0" marL="0">
+            <a:pPr marL="0" indent="0">
               <a:buNone/>
             </a:pPr>
             <a:r>
@@ -3026,7 +2794,7 @@
           <a:bodyPr wrap="square" rtlCol="0" anchor="ctr"/>
           <a:lstStyle/>
           <a:p>
-            <a:pPr indent="0" marL="0">
+            <a:pPr marL="0" indent="0">
               <a:buNone/>
             </a:pPr>
             <a:r>
@@ -3065,7 +2833,7 @@
           <a:bodyPr wrap="square" rtlCol="0" anchor="ctr"/>
           <a:lstStyle/>
           <a:p>
-            <a:pPr indent="0" marL="0">
+            <a:pPr marL="0" indent="0">
               <a:buNone/>
             </a:pPr>
             <a:r>
@@ -3104,7 +2872,7 @@
           <a:bodyPr wrap="square" rtlCol="0" anchor="ctr"/>
           <a:lstStyle/>
           <a:p>
-            <a:pPr indent="0" marL="0">
+            <a:pPr marL="0" indent="0">
               <a:buNone/>
             </a:pPr>
             <a:r>
@@ -3143,7 +2911,7 @@
           <a:bodyPr wrap="square" rtlCol="0" anchor="ctr"/>
           <a:lstStyle/>
           <a:p>
-            <a:pPr indent="0" marL="0">
+            <a:pPr marL="0" indent="0">
               <a:buNone/>
             </a:pPr>
             <a:r>
@@ -3182,7 +2950,7 @@
           <a:bodyPr wrap="square" rtlCol="0" anchor="ctr"/>
           <a:lstStyle/>
           <a:p>
-            <a:pPr indent="0" marL="0">
+            <a:pPr marL="0" indent="0">
               <a:buNone/>
             </a:pPr>
             <a:r>
@@ -3221,7 +2989,7 @@
           <a:bodyPr wrap="square" rtlCol="0" anchor="ctr"/>
           <a:lstStyle/>
           <a:p>
-            <a:pPr indent="0" marL="0">
+            <a:pPr marL="0" indent="0">
               <a:buNone/>
             </a:pPr>
             <a:r>
@@ -3260,7 +3028,7 @@
           <a:bodyPr wrap="square" rtlCol="0" anchor="ctr"/>
           <a:lstStyle/>
           <a:p>
-            <a:pPr indent="0" marL="0">
+            <a:pPr marL="0" indent="0">
               <a:buNone/>
             </a:pPr>
             <a:r>
@@ -3299,7 +3067,7 @@
           <a:bodyPr wrap="square" rtlCol="0" anchor="ctr"/>
           <a:lstStyle/>
           <a:p>
-            <a:pPr indent="0" marL="0">
+            <a:pPr marL="0" indent="0">
               <a:buNone/>
             </a:pPr>
             <a:r>
@@ -3338,7 +3106,7 @@
           <a:bodyPr wrap="square" rtlCol="0" anchor="ctr"/>
           <a:lstStyle/>
           <a:p>
-            <a:pPr indent="0" marL="0">
+            <a:pPr marL="0" indent="0">
               <a:buNone/>
             </a:pPr>
             <a:r>
@@ -3377,7 +3145,7 @@
           <a:bodyPr wrap="square" rtlCol="0" anchor="ctr"/>
           <a:lstStyle/>
           <a:p>
-            <a:pPr indent="0" marL="0">
+            <a:pPr marL="0" indent="0">
               <a:buNone/>
             </a:pPr>
             <a:r>
@@ -3394,7 +3162,7 @@
             <a:endParaRPr lang="en-US" sz="950" dirty="0"/>
           </a:p>
           <a:p>
-            <a:pPr indent="0" marL="0">
+            <a:pPr marL="0" indent="0">
               <a:buNone/>
             </a:pPr>
             <a:r>
@@ -3480,7 +3248,7 @@
           <a:bodyPr wrap="square" rtlCol="0" anchor="ctr"/>
           <a:lstStyle/>
           <a:p>
-            <a:pPr indent="0" marL="0">
+            <a:pPr marL="0" indent="0">
               <a:buNone/>
             </a:pPr>
             <a:r>
@@ -3519,7 +3287,7 @@
           <a:bodyPr wrap="square" rtlCol="0" anchor="ctr"/>
           <a:lstStyle/>
           <a:p>
-            <a:pPr indent="0" marL="0">
+            <a:pPr marL="0" indent="0">
               <a:buNone/>
             </a:pPr>
             <a:r>
@@ -3558,7 +3326,7 @@
           <a:bodyPr wrap="square" rtlCol="0" anchor="ctr"/>
           <a:lstStyle/>
           <a:p>
-            <a:pPr indent="0" marL="0">
+            <a:pPr marL="0" indent="0">
               <a:buNone/>
             </a:pPr>
             <a:r>
@@ -3597,7 +3365,7 @@
           <a:bodyPr wrap="square" rtlCol="0" anchor="ctr"/>
           <a:lstStyle/>
           <a:p>
-            <a:pPr indent="0" marL="0">
+            <a:pPr marL="0" indent="0">
               <a:buNone/>
             </a:pPr>
             <a:r>
@@ -3636,7 +3404,7 @@
           <a:bodyPr wrap="square" rtlCol="0" anchor="ctr"/>
           <a:lstStyle/>
           <a:p>
-            <a:pPr indent="0" marL="0">
+            <a:pPr marL="0" indent="0">
               <a:buNone/>
             </a:pPr>
             <a:r>
@@ -3675,7 +3443,7 @@
           <a:bodyPr wrap="square" rtlCol="0" anchor="ctr"/>
           <a:lstStyle/>
           <a:p>
-            <a:pPr indent="0" marL="0">
+            <a:pPr marL="0" indent="0">
               <a:buNone/>
             </a:pPr>
             <a:r>
@@ -3714,7 +3482,7 @@
           <a:bodyPr wrap="square" rtlCol="0" anchor="ctr"/>
           <a:lstStyle/>
           <a:p>
-            <a:pPr indent="0" marL="0">
+            <a:pPr marL="0" indent="0">
               <a:buNone/>
             </a:pPr>
             <a:r>
@@ -3753,7 +3521,7 @@
           <a:bodyPr wrap="square" rtlCol="0" anchor="ctr"/>
           <a:lstStyle/>
           <a:p>
-            <a:pPr indent="0" marL="0">
+            <a:pPr marL="0" indent="0">
               <a:buNone/>
             </a:pPr>
             <a:r>
@@ -3792,7 +3560,7 @@
           <a:bodyPr wrap="square" rtlCol="0" anchor="ctr"/>
           <a:lstStyle/>
           <a:p>
-            <a:pPr indent="0" marL="0">
+            <a:pPr marL="0" indent="0">
               <a:buNone/>
             </a:pPr>
             <a:r>
@@ -3831,7 +3599,7 @@
           <a:bodyPr wrap="square" rtlCol="0" anchor="ctr"/>
           <a:lstStyle/>
           <a:p>
-            <a:pPr indent="0" marL="0">
+            <a:pPr marL="0" indent="0">
               <a:buNone/>
             </a:pPr>
             <a:r>
@@ -3870,7 +3638,7 @@
           <a:bodyPr wrap="square" rtlCol="0" anchor="ctr"/>
           <a:lstStyle/>
           <a:p>
-            <a:pPr indent="0" marL="0">
+            <a:pPr marL="0" indent="0">
               <a:buNone/>
             </a:pPr>
             <a:r>
@@ -3909,7 +3677,7 @@
           <a:bodyPr wrap="square" rtlCol="0" anchor="ctr"/>
           <a:lstStyle/>
           <a:p>
-            <a:pPr indent="0" marL="0">
+            <a:pPr marL="0" indent="0">
               <a:buNone/>
             </a:pPr>
             <a:r>
@@ -3948,7 +3716,7 @@
           <a:bodyPr wrap="square" rtlCol="0" anchor="ctr"/>
           <a:lstStyle/>
           <a:p>
-            <a:pPr indent="0" marL="0">
+            <a:pPr marL="0" indent="0">
               <a:buNone/>
             </a:pPr>
             <a:r>
@@ -3987,7 +3755,7 @@
           <a:bodyPr wrap="square" rtlCol="0" anchor="ctr"/>
           <a:lstStyle/>
           <a:p>
-            <a:pPr indent="0" marL="0">
+            <a:pPr marL="0" indent="0">
               <a:buNone/>
             </a:pPr>
             <a:r>
@@ -4026,7 +3794,7 @@
           <a:bodyPr wrap="square" rtlCol="0" anchor="ctr"/>
           <a:lstStyle/>
           <a:p>
-            <a:pPr indent="0" marL="0">
+            <a:pPr marL="0" indent="0">
               <a:buNone/>
             </a:pPr>
             <a:r>
@@ -4065,7 +3833,7 @@
           <a:bodyPr wrap="square" rtlCol="0" anchor="ctr"/>
           <a:lstStyle/>
           <a:p>
-            <a:pPr algn="r" indent="0" marL="0">
+            <a:pPr marL="0" indent="0" algn="r">
               <a:buNone/>
             </a:pPr>
             <a:r>
@@ -4169,11 +3937,11 @@
           <a:bodyPr wrap="square" rtlCol="0" anchor="ctr"/>
           <a:lstStyle/>
           <a:p>
-            <a:pPr indent="0" marL="0">
-              <a:buNone/>
-            </a:pPr>
-            <a:r>
-              <a:rPr lang="en-US" sz="1200" b="1" spc="100" kern="0" dirty="0">
+            <a:pPr marL="0" indent="0">
+              <a:buNone/>
+            </a:pPr>
+            <a:r>
+              <a:rPr lang="en-US" sz="1200" b="1" kern="0" spc="100" dirty="0">
                 <a:solidFill>
                   <a:srgbClr val="FF9900"/>
                 </a:solidFill>
@@ -4208,7 +3976,7 @@
           <a:bodyPr wrap="square" rtlCol="0" anchor="ctr"/>
           <a:lstStyle/>
           <a:p>
-            <a:pPr indent="0" marL="0">
+            <a:pPr marL="0" indent="0">
               <a:buNone/>
             </a:pPr>
             <a:r>
@@ -4289,7 +4057,7 @@
           <a:bodyPr wrap="square" rtlCol="0" anchor="ctr"/>
           <a:lstStyle/>
           <a:p>
-            <a:pPr indent="0" marL="0">
+            <a:pPr marL="0" indent="0">
               <a:buNone/>
             </a:pPr>
             <a:r>
@@ -4328,7 +4096,7 @@
           <a:bodyPr wrap="square" rtlCol="0" anchor="t"/>
           <a:lstStyle/>
           <a:p>
-            <a:pPr indent="0" marL="0">
+            <a:pPr marL="0" indent="0">
               <a:lnSpc>
                 <a:spcPct val="112000"/>
               </a:lnSpc>
@@ -4412,7 +4180,7 @@
           <a:bodyPr wrap="square" rtlCol="0" anchor="ctr"/>
           <a:lstStyle/>
           <a:p>
-            <a:pPr indent="0" marL="0">
+            <a:pPr marL="0" indent="0">
               <a:buNone/>
             </a:pPr>
             <a:r>
@@ -4451,7 +4219,7 @@
           <a:bodyPr wrap="square" rtlCol="0" anchor="t"/>
           <a:lstStyle/>
           <a:p>
-            <a:pPr indent="0" marL="0">
+            <a:pPr marL="0" indent="0">
               <a:lnSpc>
                 <a:spcPct val="112000"/>
               </a:lnSpc>
@@ -4535,7 +4303,7 @@
           <a:bodyPr wrap="square" rtlCol="0" anchor="ctr"/>
           <a:lstStyle/>
           <a:p>
-            <a:pPr indent="0" marL="0">
+            <a:pPr marL="0" indent="0">
               <a:buNone/>
             </a:pPr>
             <a:r>
@@ -4574,7 +4342,7 @@
           <a:bodyPr wrap="square" rtlCol="0" anchor="t"/>
           <a:lstStyle/>
           <a:p>
-            <a:pPr indent="0" marL="0">
+            <a:pPr marL="0" indent="0">
               <a:lnSpc>
                 <a:spcPct val="112000"/>
               </a:lnSpc>
@@ -4658,7 +4426,7 @@
           <a:bodyPr wrap="square" rtlCol="0" anchor="ctr"/>
           <a:lstStyle/>
           <a:p>
-            <a:pPr indent="0" marL="0">
+            <a:pPr marL="0" indent="0">
               <a:buNone/>
             </a:pPr>
             <a:r>
@@ -4697,7 +4465,7 @@
           <a:bodyPr wrap="square" rtlCol="0" anchor="t"/>
           <a:lstStyle/>
           <a:p>
-            <a:pPr indent="0" marL="0">
+            <a:pPr marL="0" indent="0">
               <a:lnSpc>
                 <a:spcPct val="112000"/>
               </a:lnSpc>
@@ -4781,7 +4549,7 @@
           <a:bodyPr wrap="square" rtlCol="0" anchor="ctr"/>
           <a:lstStyle/>
           <a:p>
-            <a:pPr indent="0" marL="0">
+            <a:pPr marL="0" indent="0">
               <a:buNone/>
             </a:pPr>
             <a:r>
@@ -4820,7 +4588,7 @@
           <a:bodyPr wrap="square" rtlCol="0" anchor="t"/>
           <a:lstStyle/>
           <a:p>
-            <a:pPr indent="0" marL="0">
+            <a:pPr marL="0" indent="0">
               <a:lnSpc>
                 <a:spcPct val="112000"/>
               </a:lnSpc>
@@ -4904,7 +4672,7 @@
           <a:bodyPr wrap="square" rtlCol="0" anchor="ctr"/>
           <a:lstStyle/>
           <a:p>
-            <a:pPr indent="0" marL="0">
+            <a:pPr marL="0" indent="0">
               <a:buNone/>
             </a:pPr>
             <a:r>
@@ -4943,7 +4711,7 @@
           <a:bodyPr wrap="square" rtlCol="0" anchor="t"/>
           <a:lstStyle/>
           <a:p>
-            <a:pPr indent="0" marL="0">
+            <a:pPr marL="0" indent="0">
               <a:lnSpc>
                 <a:spcPct val="112000"/>
               </a:lnSpc>
@@ -4985,7 +4753,7 @@
           <a:bodyPr wrap="square" rtlCol="0" anchor="ctr"/>
           <a:lstStyle/>
           <a:p>
-            <a:pPr indent="0" marL="0">
+            <a:pPr marL="0" indent="0">
               <a:buNone/>
             </a:pPr>
             <a:r>
@@ -5024,7 +4792,7 @@
           <a:bodyPr wrap="square" rtlCol="0" anchor="ctr"/>
           <a:lstStyle/>
           <a:p>
-            <a:pPr algn="r" indent="0" marL="0">
+            <a:pPr marL="0" indent="0" algn="r">
               <a:buNone/>
             </a:pPr>
             <a:r>
@@ -5128,11 +4896,11 @@
           <a:bodyPr wrap="square" rtlCol="0" anchor="ctr"/>
           <a:lstStyle/>
           <a:p>
-            <a:pPr indent="0" marL="0">
-              <a:buNone/>
-            </a:pPr>
-            <a:r>
-              <a:rPr lang="en-US" sz="1200" b="1" spc="100" kern="0" dirty="0">
+            <a:pPr marL="0" indent="0">
+              <a:buNone/>
+            </a:pPr>
+            <a:r>
+              <a:rPr lang="en-US" sz="1200" b="1" kern="0" spc="100" dirty="0">
                 <a:solidFill>
                   <a:srgbClr val="FF9900"/>
                 </a:solidFill>
@@ -5167,7 +4935,7 @@
           <a:bodyPr wrap="square" rtlCol="0" anchor="ctr"/>
           <a:lstStyle/>
           <a:p>
-            <a:pPr indent="0" marL="0">
+            <a:pPr marL="0" indent="0">
               <a:buNone/>
             </a:pPr>
             <a:r>
@@ -5253,7 +5021,7 @@
           <a:bodyPr wrap="square" rtlCol="0" anchor="ctr"/>
           <a:lstStyle/>
           <a:p>
-            <a:pPr indent="0" marL="0">
+            <a:pPr marL="0" indent="0">
               <a:buNone/>
             </a:pPr>
             <a:r>
@@ -5292,7 +5060,7 @@
           <a:bodyPr wrap="square" rtlCol="0" anchor="t"/>
           <a:lstStyle/>
           <a:p>
-            <a:pPr indent="0" marL="0">
+            <a:pPr marL="0" indent="0">
               <a:lnSpc>
                 <a:spcPct val="140000"/>
               </a:lnSpc>
@@ -5308,68 +5076,11 @@
                 <a:cs typeface="Calibri" pitchFamily="34" charset="-120"/>
               </a:rPr>
               <a:t>▶  Checkout code
+▶  Setup Node.js 22
+▶  npm ci  (install Jest + AWS SDK mocks)
+▶  npm test  — 71 tests must pass
 </a:t>
             </a:r>
-            <a:pPr indent="0" marL="0">
-              <a:lnSpc>
-                <a:spcPct val="140000"/>
-              </a:lnSpc>
-              <a:buNone/>
-            </a:pPr>
-            <a:r>
-              <a:rPr lang="en-US" sz="1250" dirty="0">
-                <a:solidFill>
-                  <a:srgbClr val="16191F"/>
-                </a:solidFill>
-                <a:latin typeface="Calibri" pitchFamily="34" charset="0"/>
-                <a:ea typeface="Calibri" pitchFamily="34" charset="-122"/>
-                <a:cs typeface="Calibri" pitchFamily="34" charset="-120"/>
-              </a:rPr>
-              <a:t>▶  Setup Node.js 22
-</a:t>
-            </a:r>
-            <a:pPr indent="0" marL="0">
-              <a:lnSpc>
-                <a:spcPct val="140000"/>
-              </a:lnSpc>
-              <a:buNone/>
-            </a:pPr>
-            <a:r>
-              <a:rPr lang="en-US" sz="1250" dirty="0">
-                <a:solidFill>
-                  <a:srgbClr val="16191F"/>
-                </a:solidFill>
-                <a:latin typeface="Calibri" pitchFamily="34" charset="0"/>
-                <a:ea typeface="Calibri" pitchFamily="34" charset="-122"/>
-                <a:cs typeface="Calibri" pitchFamily="34" charset="-120"/>
-              </a:rPr>
-              <a:t>▶  npm ci  (install Jest + AWS SDK mocks)
-</a:t>
-            </a:r>
-            <a:pPr indent="0" marL="0">
-              <a:lnSpc>
-                <a:spcPct val="140000"/>
-              </a:lnSpc>
-              <a:buNone/>
-            </a:pPr>
-            <a:r>
-              <a:rPr lang="en-US" sz="1250" dirty="0">
-                <a:solidFill>
-                  <a:srgbClr val="16191F"/>
-                </a:solidFill>
-                <a:latin typeface="Calibri" pitchFamily="34" charset="0"/>
-                <a:ea typeface="Calibri" pitchFamily="34" charset="-122"/>
-                <a:cs typeface="Calibri" pitchFamily="34" charset="-120"/>
-              </a:rPr>
-              <a:t>▶  npm test  — 71 tests must pass
-</a:t>
-            </a:r>
-            <a:pPr indent="0" marL="0">
-              <a:lnSpc>
-                <a:spcPct val="140000"/>
-              </a:lnSpc>
-              <a:buNone/>
-            </a:pPr>
             <a:r>
               <a:rPr lang="en-US" sz="1250" b="1" dirty="0">
                 <a:solidFill>
@@ -5453,7 +5164,7 @@
           <a:bodyPr wrap="square" rtlCol="0" anchor="ctr"/>
           <a:lstStyle/>
           <a:p>
-            <a:pPr indent="0" marL="0">
+            <a:pPr marL="0" indent="0">
               <a:buNone/>
             </a:pPr>
             <a:r>
@@ -5492,7 +5203,7 @@
           <a:bodyPr wrap="square" rtlCol="0" anchor="t"/>
           <a:lstStyle/>
           <a:p>
-            <a:pPr indent="0" marL="0">
+            <a:pPr marL="0" indent="0">
               <a:lnSpc>
                 <a:spcPct val="140000"/>
               </a:lnSpc>
@@ -5508,96 +5219,11 @@
                 <a:cs typeface="Calibri" pitchFamily="34" charset="-120"/>
               </a:rPr>
               <a:t>▶  Configure AWS credentials from secrets
-</a:t>
-            </a:r>
-            <a:pPr indent="0" marL="0">
-              <a:lnSpc>
-                <a:spcPct val="140000"/>
-              </a:lnSpc>
-              <a:buNone/>
-            </a:pPr>
-            <a:r>
-              <a:rPr lang="en-US" sz="1250" dirty="0">
-                <a:solidFill>
-                  <a:srgbClr val="16191F"/>
-                </a:solidFill>
-                <a:latin typeface="Calibri" pitchFamily="34" charset="0"/>
-                <a:ea typeface="Calibri" pitchFamily="34" charset="-122"/>
-                <a:cs typeface="Calibri" pitchFamily="34" charset="-120"/>
-              </a:rPr>
-              <a:t>▶  npm ci in lambdas/queryApi
-</a:t>
-            </a:r>
-            <a:pPr indent="0" marL="0">
-              <a:lnSpc>
-                <a:spcPct val="140000"/>
-              </a:lnSpc>
-              <a:buNone/>
-            </a:pPr>
-            <a:r>
-              <a:rPr lang="en-US" sz="1250" dirty="0">
-                <a:solidFill>
-                  <a:srgbClr val="16191F"/>
-                </a:solidFill>
-                <a:latin typeface="Calibri" pitchFamily="34" charset="0"/>
-                <a:ea typeface="Calibri" pitchFamily="34" charset="-122"/>
-                <a:cs typeface="Calibri" pitchFamily="34" charset="-120"/>
-              </a:rPr>
-              <a:t>▶  terraform init + validate
-</a:t>
-            </a:r>
-            <a:pPr indent="0" marL="0">
-              <a:lnSpc>
-                <a:spcPct val="140000"/>
-              </a:lnSpc>
-              <a:buNone/>
-            </a:pPr>
-            <a:r>
-              <a:rPr lang="en-US" sz="1250" dirty="0">
-                <a:solidFill>
-                  <a:srgbClr val="16191F"/>
-                </a:solidFill>
-                <a:latin typeface="Calibri" pitchFamily="34" charset="0"/>
-                <a:ea typeface="Calibri" pitchFamily="34" charset="-122"/>
-                <a:cs typeface="Calibri" pitchFamily="34" charset="-120"/>
-              </a:rPr>
-              <a:t>▶  terraform plan  (log changes)
-</a:t>
-            </a:r>
-            <a:pPr indent="0" marL="0">
-              <a:lnSpc>
-                <a:spcPct val="140000"/>
-              </a:lnSpc>
-              <a:buNone/>
-            </a:pPr>
-            <a:r>
-              <a:rPr lang="en-US" sz="1250" dirty="0">
-                <a:solidFill>
-                  <a:srgbClr val="16191F"/>
-                </a:solidFill>
-                <a:latin typeface="Calibri" pitchFamily="34" charset="0"/>
-                <a:ea typeface="Calibri" pitchFamily="34" charset="-122"/>
-                <a:cs typeface="Calibri" pitchFamily="34" charset="-120"/>
-              </a:rPr>
-              <a:t>▶  terraform apply -auto-approve
-</a:t>
-            </a:r>
-            <a:pPr indent="0" marL="0">
-              <a:lnSpc>
-                <a:spcPct val="140000"/>
-              </a:lnSpc>
-              <a:buNone/>
-            </a:pPr>
-            <a:r>
-              <a:rPr lang="en-US" sz="1250" dirty="0">
-                <a:solidFill>
-                  <a:srgbClr val="16191F"/>
-                </a:solidFill>
-                <a:latin typeface="Calibri" pitchFamily="34" charset="0"/>
-                <a:ea typeface="Calibri" pitchFamily="34" charset="-122"/>
-                <a:cs typeface="Calibri" pitchFamily="34" charset="-120"/>
-              </a:rPr>
-              <a:t>▶  Print live API + frontend outputs</a:t>
+▶  npm ci in lambdas/queryApi
+▶  terraform init + validate
+▶  terraform plan  (log changes)
+▶  terraform apply -auto-approve
+▶  Print live API + frontend outputs</a:t>
             </a:r>
             <a:endParaRPr lang="en-US" sz="1250" dirty="0"/>
           </a:p>
@@ -5624,7 +5250,7 @@
           <a:bodyPr wrap="square" rtlCol="0" anchor="ctr"/>
           <a:lstStyle/>
           <a:p>
-            <a:pPr indent="0" marL="0">
+            <a:pPr marL="0" indent="0">
               <a:buNone/>
             </a:pPr>
             <a:r>
@@ -5663,7 +5289,7 @@
           <a:bodyPr wrap="square" rtlCol="0" anchor="ctr"/>
           <a:lstStyle/>
           <a:p>
-            <a:pPr indent="0" marL="0">
+            <a:pPr marL="0" indent="0">
               <a:buNone/>
             </a:pPr>
             <a:r>
@@ -5702,7 +5328,7 @@
           <a:bodyPr wrap="square" rtlCol="0" anchor="ctr"/>
           <a:lstStyle/>
           <a:p>
-            <a:pPr algn="r" indent="0" marL="0">
+            <a:pPr marL="0" indent="0" algn="r">
               <a:buNone/>
             </a:pPr>
             <a:r>
@@ -5806,11 +5432,11 @@
           <a:bodyPr wrap="square" rtlCol="0" anchor="ctr"/>
           <a:lstStyle/>
           <a:p>
-            <a:pPr indent="0" marL="0">
-              <a:buNone/>
-            </a:pPr>
-            <a:r>
-              <a:rPr lang="en-US" sz="1200" b="1" spc="100" kern="0" dirty="0">
+            <a:pPr marL="0" indent="0">
+              <a:buNone/>
+            </a:pPr>
+            <a:r>
+              <a:rPr lang="en-US" sz="1200" b="1" kern="0" spc="100" dirty="0">
                 <a:solidFill>
                   <a:srgbClr val="FF9900"/>
                 </a:solidFill>
@@ -5845,7 +5471,7 @@
           <a:bodyPr wrap="square" rtlCol="0" anchor="ctr"/>
           <a:lstStyle/>
           <a:p>
-            <a:pPr indent="0" marL="0">
+            <a:pPr marL="0" indent="0">
               <a:buNone/>
             </a:pPr>
             <a:r>
@@ -5886,9 +5512,27 @@
             <a:tbl>
               <a:tblPr/>
               <a:tblGrid>
-                <a:gridCol w="3017520"/>
-                <a:gridCol w="822960"/>
-                <a:gridCol w="7360920"/>
+                <a:gridCol w="3017520">
+                  <a:extLst>
+                    <a:ext uri="{9D8B030D-6E8A-4147-A177-3AD203B41FA5}">
+                      <a16:colId xmlns:a16="http://schemas.microsoft.com/office/drawing/2014/main" val="20000"/>
+                    </a:ext>
+                  </a:extLst>
+                </a:gridCol>
+                <a:gridCol w="822960">
+                  <a:extLst>
+                    <a:ext uri="{9D8B030D-6E8A-4147-A177-3AD203B41FA5}">
+                      <a16:colId xmlns:a16="http://schemas.microsoft.com/office/drawing/2014/main" val="20001"/>
+                    </a:ext>
+                  </a:extLst>
+                </a:gridCol>
+                <a:gridCol w="7360920">
+                  <a:extLst>
+                    <a:ext uri="{9D8B030D-6E8A-4147-A177-3AD203B41FA5}">
+                      <a16:colId xmlns:a16="http://schemas.microsoft.com/office/drawing/2014/main" val="20002"/>
+                    </a:ext>
+                  </a:extLst>
+                </a:gridCol>
               </a:tblGrid>
               <a:tr h="548640">
                 <a:tc>
@@ -5896,7 +5540,7 @@
                     <a:bodyPr/>
                     <a:lstStyle/>
                     <a:p>
-                      <a:pPr indent="0" marL="0">
+                      <a:pPr marL="0" indent="0">
                         <a:buNone/>
                       </a:pPr>
                       <a:r>
@@ -5910,7 +5554,7 @@
                       <a:endParaRPr lang="en-US" sz="1200" dirty="0"/>
                     </a:p>
                   </a:txBody>
-                  <a:tcPr marL="91440" marR="91440" marT="45720" marB="45720" anchor="ctr">
+                  <a:tcPr anchor="ctr">
                     <a:lnL w="9525" cap="flat" cmpd="sng" algn="ctr">
                       <a:solidFill>
                         <a:srgbClr val="E3E7EA"/>
@@ -5957,7 +5601,7 @@
                     <a:bodyPr/>
                     <a:lstStyle/>
                     <a:p>
-                      <a:pPr indent="0" marL="0">
+                      <a:pPr marL="0" indent="0">
                         <a:buNone/>
                       </a:pPr>
                       <a:r>
@@ -5971,7 +5615,7 @@
                       <a:endParaRPr lang="en-US" sz="1200" dirty="0"/>
                     </a:p>
                   </a:txBody>
-                  <a:tcPr marL="91440" marR="91440" marT="45720" marB="45720" anchor="ctr">
+                  <a:tcPr anchor="ctr">
                     <a:lnL w="9525" cap="flat" cmpd="sng" algn="ctr">
                       <a:solidFill>
                         <a:srgbClr val="E3E7EA"/>
@@ -6018,7 +5662,7 @@
                     <a:bodyPr/>
                     <a:lstStyle/>
                     <a:p>
-                      <a:pPr indent="0" marL="0">
+                      <a:pPr marL="0" indent="0">
                         <a:buNone/>
                       </a:pPr>
                       <a:r>
@@ -6032,7 +5676,7 @@
                       <a:endParaRPr lang="en-US" sz="1200" dirty="0"/>
                     </a:p>
                   </a:txBody>
-                  <a:tcPr marL="91440" marR="91440" marT="45720" marB="45720" anchor="ctr">
+                  <a:tcPr anchor="ctr">
                     <a:lnL w="9525" cap="flat" cmpd="sng" algn="ctr">
                       <a:solidFill>
                         <a:srgbClr val="E3E7EA"/>
@@ -6074,6 +5718,11 @@
                     </a:solidFill>
                   </a:tcPr>
                 </a:tc>
+                <a:extLst>
+                  <a:ext uri="{0D108BD9-81ED-4DB2-BD59-A6C34878D82A}">
+                    <a16:rowId xmlns:a16="http://schemas.microsoft.com/office/drawing/2014/main" val="10000"/>
+                  </a:ext>
+                </a:extLst>
               </a:tr>
               <a:tr h="548640">
                 <a:tc>
@@ -6081,7 +5730,7 @@
                     <a:bodyPr/>
                     <a:lstStyle/>
                     <a:p>
-                      <a:pPr indent="0" marL="0">
+                      <a:pPr marL="0" indent="0">
                         <a:buNone/>
                       </a:pPr>
                       <a:r>
@@ -6102,7 +5751,7 @@
                       </a:endParaRPr>
                     </a:p>
                   </a:txBody>
-                  <a:tcPr marL="91440" marR="91440" marT="45720" marB="45720" anchor="ctr">
+                  <a:tcPr anchor="ctr">
                     <a:lnL w="9525" cap="flat" cmpd="sng" algn="ctr">
                       <a:solidFill>
                         <a:srgbClr val="E3E7EA"/>
@@ -6149,7 +5798,7 @@
                     <a:bodyPr/>
                     <a:lstStyle/>
                     <a:p>
-                      <a:pPr algn="ctr" indent="0" marL="0">
+                      <a:pPr marL="0" indent="0" algn="ctr">
                         <a:buNone/>
                       </a:pPr>
                       <a:r>
@@ -6163,7 +5812,7 @@
                       <a:endParaRPr lang="en-US" sz="1200" dirty="0"/>
                     </a:p>
                   </a:txBody>
-                  <a:tcPr marL="91440" marR="91440" marT="45720" marB="45720" anchor="ctr">
+                  <a:tcPr anchor="ctr">
                     <a:lnL w="9525" cap="flat" cmpd="sng" algn="ctr">
                       <a:solidFill>
                         <a:srgbClr val="E3E7EA"/>
@@ -6210,7 +5859,7 @@
                     <a:bodyPr/>
                     <a:lstStyle/>
                     <a:p>
-                      <a:pPr indent="0" marL="0">
+                      <a:pPr marL="0" indent="0">
                         <a:buNone/>
                       </a:pPr>
                       <a:r>
@@ -6224,7 +5873,7 @@
                       <a:endParaRPr lang="en-US" sz="1050" dirty="0"/>
                     </a:p>
                   </a:txBody>
-                  <a:tcPr marL="91440" marR="91440" marT="45720" marB="45720" anchor="ctr">
+                  <a:tcPr anchor="ctr">
                     <a:lnL w="9525" cap="flat" cmpd="sng" algn="ctr">
                       <a:solidFill>
                         <a:srgbClr val="E3E7EA"/>
@@ -6266,6 +5915,11 @@
                     </a:solidFill>
                   </a:tcPr>
                 </a:tc>
+                <a:extLst>
+                  <a:ext uri="{0D108BD9-81ED-4DB2-BD59-A6C34878D82A}">
+                    <a16:rowId xmlns:a16="http://schemas.microsoft.com/office/drawing/2014/main" val="10001"/>
+                  </a:ext>
+                </a:extLst>
               </a:tr>
               <a:tr h="548640">
                 <a:tc>
@@ -6273,7 +5927,7 @@
                     <a:bodyPr/>
                     <a:lstStyle/>
                     <a:p>
-                      <a:pPr indent="0" marL="0">
+                      <a:pPr marL="0" indent="0">
                         <a:buNone/>
                       </a:pPr>
                       <a:r>
@@ -6294,7 +5948,7 @@
                       </a:endParaRPr>
                     </a:p>
                   </a:txBody>
-                  <a:tcPr marL="91440" marR="91440" marT="45720" marB="45720" anchor="ctr">
+                  <a:tcPr anchor="ctr">
                     <a:lnL w="9525" cap="flat" cmpd="sng" algn="ctr">
                       <a:solidFill>
                         <a:srgbClr val="E3E7EA"/>
@@ -6341,7 +5995,7 @@
                     <a:bodyPr/>
                     <a:lstStyle/>
                     <a:p>
-                      <a:pPr algn="ctr" indent="0" marL="0">
+                      <a:pPr marL="0" indent="0" algn="ctr">
                         <a:buNone/>
                       </a:pPr>
                       <a:r>
@@ -6355,7 +6009,7 @@
                       <a:endParaRPr lang="en-US" sz="1200" dirty="0"/>
                     </a:p>
                   </a:txBody>
-                  <a:tcPr marL="91440" marR="91440" marT="45720" marB="45720" anchor="ctr">
+                  <a:tcPr anchor="ctr">
                     <a:lnL w="9525" cap="flat" cmpd="sng" algn="ctr">
                       <a:solidFill>
                         <a:srgbClr val="E3E7EA"/>
@@ -6402,7 +6056,7 @@
                     <a:bodyPr/>
                     <a:lstStyle/>
                     <a:p>
-                      <a:pPr indent="0" marL="0">
+                      <a:pPr marL="0" indent="0">
                         <a:buNone/>
                       </a:pPr>
                       <a:r>
@@ -6416,7 +6070,7 @@
                       <a:endParaRPr lang="en-US" sz="1050" dirty="0"/>
                     </a:p>
                   </a:txBody>
-                  <a:tcPr marL="91440" marR="91440" marT="45720" marB="45720" anchor="ctr">
+                  <a:tcPr anchor="ctr">
                     <a:lnL w="9525" cap="flat" cmpd="sng" algn="ctr">
                       <a:solidFill>
                         <a:srgbClr val="E3E7EA"/>
@@ -6458,6 +6112,11 @@
                     </a:solidFill>
                   </a:tcPr>
                 </a:tc>
+                <a:extLst>
+                  <a:ext uri="{0D108BD9-81ED-4DB2-BD59-A6C34878D82A}">
+                    <a16:rowId xmlns:a16="http://schemas.microsoft.com/office/drawing/2014/main" val="10002"/>
+                  </a:ext>
+                </a:extLst>
               </a:tr>
               <a:tr h="548640">
                 <a:tc>
@@ -6465,7 +6124,7 @@
                     <a:bodyPr/>
                     <a:lstStyle/>
                     <a:p>
-                      <a:pPr indent="0" marL="0">
+                      <a:pPr marL="0" indent="0">
                         <a:buNone/>
                       </a:pPr>
                       <a:r>
@@ -6486,7 +6145,7 @@
                       </a:endParaRPr>
                     </a:p>
                   </a:txBody>
-                  <a:tcPr marL="91440" marR="91440" marT="45720" marB="45720" anchor="ctr">
+                  <a:tcPr anchor="ctr">
                     <a:lnL w="9525" cap="flat" cmpd="sng" algn="ctr">
                       <a:solidFill>
                         <a:srgbClr val="E3E7EA"/>
@@ -6533,7 +6192,7 @@
                     <a:bodyPr/>
                     <a:lstStyle/>
                     <a:p>
-                      <a:pPr algn="ctr" indent="0" marL="0">
+                      <a:pPr marL="0" indent="0" algn="ctr">
                         <a:buNone/>
                       </a:pPr>
                       <a:r>
@@ -6547,7 +6206,7 @@
                       <a:endParaRPr lang="en-US" sz="1200" dirty="0"/>
                     </a:p>
                   </a:txBody>
-                  <a:tcPr marL="91440" marR="91440" marT="45720" marB="45720" anchor="ctr">
+                  <a:tcPr anchor="ctr">
                     <a:lnL w="9525" cap="flat" cmpd="sng" algn="ctr">
                       <a:solidFill>
                         <a:srgbClr val="E3E7EA"/>
@@ -6594,7 +6253,7 @@
                     <a:bodyPr/>
                     <a:lstStyle/>
                     <a:p>
-                      <a:pPr indent="0" marL="0">
+                      <a:pPr marL="0" indent="0">
                         <a:buNone/>
                       </a:pPr>
                       <a:r>
@@ -6608,7 +6267,7 @@
                       <a:endParaRPr lang="en-US" sz="1050" dirty="0"/>
                     </a:p>
                   </a:txBody>
-                  <a:tcPr marL="91440" marR="91440" marT="45720" marB="45720" anchor="ctr">
+                  <a:tcPr anchor="ctr">
                     <a:lnL w="9525" cap="flat" cmpd="sng" algn="ctr">
                       <a:solidFill>
                         <a:srgbClr val="E3E7EA"/>
@@ -6650,6 +6309,11 @@
                     </a:solidFill>
                   </a:tcPr>
                 </a:tc>
+                <a:extLst>
+                  <a:ext uri="{0D108BD9-81ED-4DB2-BD59-A6C34878D82A}">
+                    <a16:rowId xmlns:a16="http://schemas.microsoft.com/office/drawing/2014/main" val="10003"/>
+                  </a:ext>
+                </a:extLst>
               </a:tr>
               <a:tr h="548640">
                 <a:tc>
@@ -6657,7 +6321,7 @@
                     <a:bodyPr/>
                     <a:lstStyle/>
                     <a:p>
-                      <a:pPr indent="0" marL="0">
+                      <a:pPr marL="0" indent="0">
                         <a:buNone/>
                       </a:pPr>
                       <a:r>
@@ -6678,7 +6342,7 @@
                       </a:endParaRPr>
                     </a:p>
                   </a:txBody>
-                  <a:tcPr marL="91440" marR="91440" marT="45720" marB="45720" anchor="ctr">
+                  <a:tcPr anchor="ctr">
                     <a:lnL w="9525" cap="flat" cmpd="sng" algn="ctr">
                       <a:solidFill>
                         <a:srgbClr val="E3E7EA"/>
@@ -6725,7 +6389,7 @@
                     <a:bodyPr/>
                     <a:lstStyle/>
                     <a:p>
-                      <a:pPr algn="ctr" indent="0" marL="0">
+                      <a:pPr marL="0" indent="0" algn="ctr">
                         <a:buNone/>
                       </a:pPr>
                       <a:r>
@@ -6739,7 +6403,7 @@
                       <a:endParaRPr lang="en-US" sz="1200" dirty="0"/>
                     </a:p>
                   </a:txBody>
-                  <a:tcPr marL="91440" marR="91440" marT="45720" marB="45720" anchor="ctr">
+                  <a:tcPr anchor="ctr">
                     <a:lnL w="9525" cap="flat" cmpd="sng" algn="ctr">
                       <a:solidFill>
                         <a:srgbClr val="E3E7EA"/>
@@ -6786,7 +6450,7 @@
                     <a:bodyPr/>
                     <a:lstStyle/>
                     <a:p>
-                      <a:pPr indent="0" marL="0">
+                      <a:pPr marL="0" indent="0">
                         <a:buNone/>
                       </a:pPr>
                       <a:r>
@@ -6800,7 +6464,7 @@
                       <a:endParaRPr lang="en-US" sz="1050" dirty="0"/>
                     </a:p>
                   </a:txBody>
-                  <a:tcPr marL="91440" marR="91440" marT="45720" marB="45720" anchor="ctr">
+                  <a:tcPr anchor="ctr">
                     <a:lnL w="9525" cap="flat" cmpd="sng" algn="ctr">
                       <a:solidFill>
                         <a:srgbClr val="E3E7EA"/>
@@ -6842,6 +6506,11 @@
                     </a:solidFill>
                   </a:tcPr>
                 </a:tc>
+                <a:extLst>
+                  <a:ext uri="{0D108BD9-81ED-4DB2-BD59-A6C34878D82A}">
+                    <a16:rowId xmlns:a16="http://schemas.microsoft.com/office/drawing/2014/main" val="10004"/>
+                  </a:ext>
+                </a:extLst>
               </a:tr>
               <a:tr h="548640">
                 <a:tc>
@@ -6849,7 +6518,7 @@
                     <a:bodyPr/>
                     <a:lstStyle/>
                     <a:p>
-                      <a:pPr indent="0" marL="0">
+                      <a:pPr marL="0" indent="0">
                         <a:buNone/>
                       </a:pPr>
                       <a:r>
@@ -6870,7 +6539,7 @@
                       </a:endParaRPr>
                     </a:p>
                   </a:txBody>
-                  <a:tcPr marL="91440" marR="91440" marT="45720" marB="45720" anchor="ctr">
+                  <a:tcPr anchor="ctr">
                     <a:lnL w="9525" cap="flat" cmpd="sng" algn="ctr">
                       <a:solidFill>
                         <a:srgbClr val="E3E7EA"/>
@@ -6917,7 +6586,7 @@
                     <a:bodyPr/>
                     <a:lstStyle/>
                     <a:p>
-                      <a:pPr algn="ctr" indent="0" marL="0">
+                      <a:pPr marL="0" indent="0" algn="ctr">
                         <a:buNone/>
                       </a:pPr>
                       <a:r>
@@ -6931,7 +6600,7 @@
                       <a:endParaRPr lang="en-US" sz="1200" dirty="0"/>
                     </a:p>
                   </a:txBody>
-                  <a:tcPr marL="91440" marR="91440" marT="45720" marB="45720" anchor="ctr">
+                  <a:tcPr anchor="ctr">
                     <a:lnL w="9525" cap="flat" cmpd="sng" algn="ctr">
                       <a:solidFill>
                         <a:srgbClr val="E3E7EA"/>
@@ -6978,7 +6647,7 @@
                     <a:bodyPr/>
                     <a:lstStyle/>
                     <a:p>
-                      <a:pPr indent="0" marL="0">
+                      <a:pPr marL="0" indent="0">
                         <a:buNone/>
                       </a:pPr>
                       <a:r>
@@ -6992,7 +6661,7 @@
                       <a:endParaRPr lang="en-US" sz="1050" dirty="0"/>
                     </a:p>
                   </a:txBody>
-                  <a:tcPr marL="91440" marR="91440" marT="45720" marB="45720" anchor="ctr">
+                  <a:tcPr anchor="ctr">
                     <a:lnL w="9525" cap="flat" cmpd="sng" algn="ctr">
                       <a:solidFill>
                         <a:srgbClr val="E3E7EA"/>
@@ -7034,6 +6703,11 @@
                     </a:solidFill>
                   </a:tcPr>
                 </a:tc>
+                <a:extLst>
+                  <a:ext uri="{0D108BD9-81ED-4DB2-BD59-A6C34878D82A}">
+                    <a16:rowId xmlns:a16="http://schemas.microsoft.com/office/drawing/2014/main" val="10005"/>
+                  </a:ext>
+                </a:extLst>
               </a:tr>
               <a:tr h="548640">
                 <a:tc>
@@ -7041,7 +6715,7 @@
                     <a:bodyPr/>
                     <a:lstStyle/>
                     <a:p>
-                      <a:pPr indent="0" marL="0">
+                      <a:pPr marL="0" indent="0">
                         <a:buNone/>
                       </a:pPr>
                       <a:r>
@@ -7062,7 +6736,7 @@
                       </a:endParaRPr>
                     </a:p>
                   </a:txBody>
-                  <a:tcPr marL="91440" marR="91440" marT="45720" marB="45720" anchor="ctr">
+                  <a:tcPr anchor="ctr">
                     <a:lnL w="9525" cap="flat" cmpd="sng" algn="ctr">
                       <a:solidFill>
                         <a:srgbClr val="E3E7EA"/>
@@ -7109,7 +6783,7 @@
                     <a:bodyPr/>
                     <a:lstStyle/>
                     <a:p>
-                      <a:pPr algn="ctr" indent="0" marL="0">
+                      <a:pPr marL="0" indent="0" algn="ctr">
                         <a:buNone/>
                       </a:pPr>
                       <a:r>
@@ -7123,7 +6797,7 @@
                       <a:endParaRPr lang="en-US" sz="1200" dirty="0"/>
                     </a:p>
                   </a:txBody>
-                  <a:tcPr marL="91440" marR="91440" marT="45720" marB="45720" anchor="ctr">
+                  <a:tcPr anchor="ctr">
                     <a:lnL w="9525" cap="flat" cmpd="sng" algn="ctr">
                       <a:solidFill>
                         <a:srgbClr val="E3E7EA"/>
@@ -7170,7 +6844,7 @@
                     <a:bodyPr/>
                     <a:lstStyle/>
                     <a:p>
-                      <a:pPr indent="0" marL="0">
+                      <a:pPr marL="0" indent="0">
                         <a:buNone/>
                       </a:pPr>
                       <a:r>
@@ -7184,7 +6858,7 @@
                       <a:endParaRPr lang="en-US" sz="1050" dirty="0"/>
                     </a:p>
                   </a:txBody>
-                  <a:tcPr marL="91440" marR="91440" marT="45720" marB="45720" anchor="ctr">
+                  <a:tcPr anchor="ctr">
                     <a:lnL w="9525" cap="flat" cmpd="sng" algn="ctr">
                       <a:solidFill>
                         <a:srgbClr val="E3E7EA"/>
@@ -7226,6 +6900,11 @@
                     </a:solidFill>
                   </a:tcPr>
                 </a:tc>
+                <a:extLst>
+                  <a:ext uri="{0D108BD9-81ED-4DB2-BD59-A6C34878D82A}">
+                    <a16:rowId xmlns:a16="http://schemas.microsoft.com/office/drawing/2014/main" val="10006"/>
+                  </a:ext>
+                </a:extLst>
               </a:tr>
             </a:tbl>
           </a:graphicData>
@@ -7252,7 +6931,7 @@
           <a:bodyPr wrap="square" rtlCol="0" anchor="ctr"/>
           <a:lstStyle/>
           <a:p>
-            <a:pPr indent="0" marL="0">
+            <a:pPr marL="0" indent="0">
               <a:buNone/>
             </a:pPr>
             <a:r>
@@ -7291,7 +6970,7 @@
           <a:bodyPr wrap="square" rtlCol="0" anchor="ctr"/>
           <a:lstStyle/>
           <a:p>
-            <a:pPr indent="0" marL="0">
+            <a:pPr marL="0" indent="0">
               <a:buNone/>
             </a:pPr>
             <a:r>
@@ -7330,7 +7009,7 @@
           <a:bodyPr wrap="square" rtlCol="0" anchor="ctr"/>
           <a:lstStyle/>
           <a:p>
-            <a:pPr algn="r" indent="0" marL="0">
+            <a:pPr marL="0" indent="0" algn="r">
               <a:buNone/>
             </a:pPr>
             <a:r>
@@ -7434,11 +7113,11 @@
           <a:bodyPr wrap="square" rtlCol="0" anchor="ctr"/>
           <a:lstStyle/>
           <a:p>
-            <a:pPr indent="0" marL="0">
-              <a:buNone/>
-            </a:pPr>
-            <a:r>
-              <a:rPr lang="en-US" sz="1200" b="1" spc="100" kern="0" dirty="0">
+            <a:pPr marL="0" indent="0">
+              <a:buNone/>
+            </a:pPr>
+            <a:r>
+              <a:rPr lang="en-US" sz="1200" b="1" kern="0" spc="100" dirty="0">
                 <a:solidFill>
                   <a:srgbClr val="FF9900"/>
                 </a:solidFill>
@@ -7473,7 +7152,7 @@
           <a:bodyPr wrap="square" rtlCol="0" anchor="ctr"/>
           <a:lstStyle/>
           <a:p>
-            <a:pPr indent="0" marL="0">
+            <a:pPr marL="0" indent="0">
               <a:buNone/>
             </a:pPr>
             <a:r>
@@ -7532,7 +7211,7 @@
           <a:bodyPr wrap="square" rtlCol="0" anchor="ctr"/>
           <a:lstStyle/>
           <a:p>
-            <a:pPr indent="0" marL="0">
+            <a:pPr marL="0" indent="0">
               <a:buNone/>
             </a:pPr>
             <a:r>
@@ -7571,7 +7250,7 @@
           <a:bodyPr wrap="square" rtlCol="0" anchor="t"/>
           <a:lstStyle/>
           <a:p>
-            <a:pPr indent="0" marL="0">
+            <a:pPr marL="0" indent="0">
               <a:lnSpc>
                 <a:spcPct val="115000"/>
               </a:lnSpc>
@@ -7587,9 +7266,97 @@
                 <a:cs typeface="Calibri" pitchFamily="34" charset="-120"/>
               </a:rPr>
               <a:t>⚠  No per-Lambda IAM roles — LabRole blocks CreateRole; one shared, over-permissioned role.
+⚠  No AWS WAF — WAF integration requires a REST API; this project uses an HTTP API.
+⚠  External AI API (Hugging Face) — Bedrock is unavailable in the Learner Lab.
+⚠  No CloudFront CDN — CreateDistribution is blocked by the LabRole policy.
+⚠  No X-Ray tracing — xray:PutTraceSegments is blocked by the LabRole policy.
 </a:t>
             </a:r>
-            <a:pPr indent="0" marL="0">
+            <a:endParaRPr lang="en-US" sz="1100" dirty="0"/>
+          </a:p>
+        </p:txBody>
+      </p:sp>
+      <p:sp>
+        <p:nvSpPr>
+          <p:cNvPr id="9" name="Shape 7"/>
+          <p:cNvSpPr/>
+          <p:nvPr/>
+        </p:nvSpPr>
+        <p:spPr>
+          <a:xfrm>
+            <a:off x="6263640" y="1371600"/>
+            <a:ext cx="5440680" cy="411480"/>
+          </a:xfrm>
+          <a:prstGeom prst="rect">
+            <a:avLst/>
+          </a:prstGeom>
+          <a:solidFill>
+            <a:srgbClr val="1D8102"/>
+          </a:solidFill>
+          <a:ln/>
+        </p:spPr>
+      </p:sp>
+      <p:sp>
+        <p:nvSpPr>
+          <p:cNvPr id="10" name="Text 8"/>
+          <p:cNvSpPr/>
+          <p:nvPr/>
+        </p:nvSpPr>
+        <p:spPr>
+          <a:xfrm>
+            <a:off x="6446520" y="1426464"/>
+            <a:ext cx="5029200" cy="320040"/>
+          </a:xfrm>
+          <a:prstGeom prst="rect">
+            <a:avLst/>
+          </a:prstGeom>
+          <a:noFill/>
+          <a:ln/>
+        </p:spPr>
+        <p:txBody>
+          <a:bodyPr wrap="square" rtlCol="0" anchor="ctr"/>
+          <a:lstStyle/>
+          <a:p>
+            <a:pPr marL="0" indent="0">
+              <a:buNone/>
+            </a:pPr>
+            <a:r>
+              <a:rPr lang="en-US" sz="1300" b="1" dirty="0">
+                <a:solidFill>
+                  <a:srgbClr val="FFFFFF"/>
+                </a:solidFill>
+                <a:latin typeface="Calibri" pitchFamily="34" charset="0"/>
+                <a:ea typeface="Calibri" pitchFamily="34" charset="-122"/>
+                <a:cs typeface="Calibri" pitchFamily="34" charset="-120"/>
+              </a:rPr>
+              <a:t>FUTURE ENHANCEMENTS</a:t>
+            </a:r>
+            <a:endParaRPr lang="en-US" sz="1300" dirty="0"/>
+          </a:p>
+        </p:txBody>
+      </p:sp>
+      <p:sp>
+        <p:nvSpPr>
+          <p:cNvPr id="11" name="Text 9"/>
+          <p:cNvSpPr/>
+          <p:nvPr/>
+        </p:nvSpPr>
+        <p:spPr>
+          <a:xfrm>
+            <a:off x="6446520" y="1920240"/>
+            <a:ext cx="5120640" cy="4206240"/>
+          </a:xfrm>
+          <a:prstGeom prst="rect">
+            <a:avLst/>
+          </a:prstGeom>
+          <a:noFill/>
+          <a:ln/>
+        </p:spPr>
+        <p:txBody>
+          <a:bodyPr wrap="square" rtlCol="0" anchor="t"/>
+          <a:lstStyle/>
+          <a:p>
+            <a:pPr marL="0" indent="0">
               <a:lnSpc>
                 <a:spcPct val="115000"/>
               </a:lnSpc>
@@ -7604,235 +7371,11 @@
                 <a:ea typeface="Calibri" pitchFamily="34" charset="-122"/>
                 <a:cs typeface="Calibri" pitchFamily="34" charset="-120"/>
               </a:rPr>
-              <a:t>⚠  No AWS WAF — WAF integration requires a REST API; this project uses an HTTP API.
-</a:t>
-            </a:r>
-            <a:pPr indent="0" marL="0">
-              <a:lnSpc>
-                <a:spcPct val="115000"/>
-              </a:lnSpc>
-              <a:buNone/>
-            </a:pPr>
-            <a:r>
-              <a:rPr lang="en-US" sz="1100" dirty="0">
-                <a:solidFill>
-                  <a:srgbClr val="16191F"/>
-                </a:solidFill>
-                <a:latin typeface="Calibri" pitchFamily="34" charset="0"/>
-                <a:ea typeface="Calibri" pitchFamily="34" charset="-122"/>
-                <a:cs typeface="Calibri" pitchFamily="34" charset="-120"/>
-              </a:rPr>
-              <a:t>⚠  External AI API (Hugging Face) — Bedrock is unavailable in the Learner Lab.
-</a:t>
-            </a:r>
-            <a:pPr indent="0" marL="0">
-              <a:lnSpc>
-                <a:spcPct val="115000"/>
-              </a:lnSpc>
-              <a:buNone/>
-            </a:pPr>
-            <a:r>
-              <a:rPr lang="en-US" sz="1100" dirty="0">
-                <a:solidFill>
-                  <a:srgbClr val="16191F"/>
-                </a:solidFill>
-                <a:latin typeface="Calibri" pitchFamily="34" charset="0"/>
-                <a:ea typeface="Calibri" pitchFamily="34" charset="-122"/>
-                <a:cs typeface="Calibri" pitchFamily="34" charset="-120"/>
-              </a:rPr>
-              <a:t>⚠  No CloudFront CDN — CreateDistribution is blocked by the LabRole policy.
-</a:t>
-            </a:r>
-            <a:pPr indent="0" marL="0">
-              <a:lnSpc>
-                <a:spcPct val="115000"/>
-              </a:lnSpc>
-              <a:buNone/>
-            </a:pPr>
-            <a:r>
-              <a:rPr lang="en-US" sz="1100" dirty="0">
-                <a:solidFill>
-                  <a:srgbClr val="16191F"/>
-                </a:solidFill>
-                <a:latin typeface="Calibri" pitchFamily="34" charset="0"/>
-                <a:ea typeface="Calibri" pitchFamily="34" charset="-122"/>
-                <a:cs typeface="Calibri" pitchFamily="34" charset="-120"/>
-              </a:rPr>
-              <a:t>⚠  No X-Ray tracing — xray:PutTraceSegments is blocked by the LabRole policy.
-</a:t>
-            </a:r>
-            <a:endParaRPr lang="en-US" sz="1100" dirty="0"/>
-          </a:p>
-        </p:txBody>
-      </p:sp>
-      <p:sp>
-        <p:nvSpPr>
-          <p:cNvPr id="9" name="Shape 7"/>
-          <p:cNvSpPr/>
-          <p:nvPr/>
-        </p:nvSpPr>
-        <p:spPr>
-          <a:xfrm>
-            <a:off x="6263640" y="1371600"/>
-            <a:ext cx="5440680" cy="411480"/>
-          </a:xfrm>
-          <a:prstGeom prst="rect">
-            <a:avLst/>
-          </a:prstGeom>
-          <a:solidFill>
-            <a:srgbClr val="1D8102"/>
-          </a:solidFill>
-          <a:ln/>
-        </p:spPr>
-      </p:sp>
-      <p:sp>
-        <p:nvSpPr>
-          <p:cNvPr id="10" name="Text 8"/>
-          <p:cNvSpPr/>
-          <p:nvPr/>
-        </p:nvSpPr>
-        <p:spPr>
-          <a:xfrm>
-            <a:off x="6446520" y="1426464"/>
-            <a:ext cx="5029200" cy="320040"/>
-          </a:xfrm>
-          <a:prstGeom prst="rect">
-            <a:avLst/>
-          </a:prstGeom>
-          <a:noFill/>
-          <a:ln/>
-        </p:spPr>
-        <p:txBody>
-          <a:bodyPr wrap="square" rtlCol="0" anchor="ctr"/>
-          <a:lstStyle/>
-          <a:p>
-            <a:pPr indent="0" marL="0">
-              <a:buNone/>
-            </a:pPr>
-            <a:r>
-              <a:rPr lang="en-US" sz="1300" b="1" dirty="0">
-                <a:solidFill>
-                  <a:srgbClr val="FFFFFF"/>
-                </a:solidFill>
-                <a:latin typeface="Calibri" pitchFamily="34" charset="0"/>
-                <a:ea typeface="Calibri" pitchFamily="34" charset="-122"/>
-                <a:cs typeface="Calibri" pitchFamily="34" charset="-120"/>
-              </a:rPr>
-              <a:t>FUTURE ENHANCEMENTS</a:t>
-            </a:r>
-            <a:endParaRPr lang="en-US" sz="1300" dirty="0"/>
-          </a:p>
-        </p:txBody>
-      </p:sp>
-      <p:sp>
-        <p:nvSpPr>
-          <p:cNvPr id="11" name="Text 9"/>
-          <p:cNvSpPr/>
-          <p:nvPr/>
-        </p:nvSpPr>
-        <p:spPr>
-          <a:xfrm>
-            <a:off x="6446520" y="1920240"/>
-            <a:ext cx="5120640" cy="4206240"/>
-          </a:xfrm>
-          <a:prstGeom prst="rect">
-            <a:avLst/>
-          </a:prstGeom>
-          <a:noFill/>
-          <a:ln/>
-        </p:spPr>
-        <p:txBody>
-          <a:bodyPr wrap="square" rtlCol="0" anchor="t"/>
-          <a:lstStyle/>
-          <a:p>
-            <a:pPr indent="0" marL="0">
-              <a:lnSpc>
-                <a:spcPct val="115000"/>
-              </a:lnSpc>
-              <a:buNone/>
-            </a:pPr>
-            <a:r>
-              <a:rPr lang="en-US" sz="1100" dirty="0">
-                <a:solidFill>
-                  <a:srgbClr val="16191F"/>
-                </a:solidFill>
-                <a:latin typeface="Calibri" pitchFamily="34" charset="0"/>
-                <a:ea typeface="Calibri" pitchFamily="34" charset="-122"/>
-                <a:cs typeface="Calibri" pitchFamily="34" charset="-120"/>
-              </a:rPr>
               <a:t>→  Migrate AI scoring to Amazon Bedrock (Claude 3 Haiku) — remove the external dependency.
-</a:t>
-            </a:r>
-            <a:pPr indent="0" marL="0">
-              <a:lnSpc>
-                <a:spcPct val="115000"/>
-              </a:lnSpc>
-              <a:buNone/>
-            </a:pPr>
-            <a:r>
-              <a:rPr lang="en-US" sz="1100" dirty="0">
-                <a:solidFill>
-                  <a:srgbClr val="16191F"/>
-                </a:solidFill>
-                <a:latin typeface="Calibri" pitchFamily="34" charset="0"/>
-                <a:ea typeface="Calibri" pitchFamily="34" charset="-122"/>
-                <a:cs typeface="Calibri" pitchFamily="34" charset="-120"/>
-              </a:rPr>
-              <a:t>→  WebSocket API for real-time notifications, replacing the 5-second polling loop.
-</a:t>
-            </a:r>
-            <a:pPr indent="0" marL="0">
-              <a:lnSpc>
-                <a:spcPct val="115000"/>
-              </a:lnSpc>
-              <a:buNone/>
-            </a:pPr>
-            <a:r>
-              <a:rPr lang="en-US" sz="1100" dirty="0">
-                <a:solidFill>
-                  <a:srgbClr val="16191F"/>
-                </a:solidFill>
-                <a:latin typeface="Calibri" pitchFamily="34" charset="0"/>
-                <a:ea typeface="Calibri" pitchFamily="34" charset="-122"/>
-                <a:cs typeface="Calibri" pitchFamily="34" charset="-120"/>
-              </a:rPr>
-              <a:t>→  Resume versioning — track score improvement across multiple uploads.
-</a:t>
-            </a:r>
-            <a:pPr indent="0" marL="0">
-              <a:lnSpc>
-                <a:spcPct val="115000"/>
-              </a:lnSpc>
-              <a:buNone/>
-            </a:pPr>
-            <a:r>
-              <a:rPr lang="en-US" sz="1100" dirty="0">
-                <a:solidFill>
-                  <a:srgbClr val="16191F"/>
-                </a:solidFill>
-                <a:latin typeface="Calibri" pitchFamily="34" charset="0"/>
-                <a:ea typeface="Calibri" pitchFamily="34" charset="-122"/>
-                <a:cs typeface="Calibri" pitchFamily="34" charset="-120"/>
-              </a:rPr>
-              <a:t>→  Multi-region active-passive with DynamoDB Global Tables + Route 53 failover.
-</a:t>
-            </a:r>
-            <a:pPr indent="0" marL="0">
-              <a:lnSpc>
-                <a:spcPct val="115000"/>
-              </a:lnSpc>
-              <a:buNone/>
-            </a:pPr>
-            <a:r>
-              <a:rPr lang="en-US" sz="1100" dirty="0">
-                <a:solidFill>
-                  <a:srgbClr val="16191F"/>
-                </a:solidFill>
-                <a:latin typeface="Calibri" pitchFamily="34" charset="0"/>
-                <a:ea typeface="Calibri" pitchFamily="34" charset="-122"/>
-                <a:cs typeface="Calibri" pitchFamily="34" charset="-120"/>
-              </a:rPr>
-              <a:t>→  DynamoDB PITR, WAF, and per-Lambda execution roles for production hardening.
+→  WebSocket API for real-time notifications, replacing the 5-second polling loop.
+→  Resume versioning — track score improvement across multiple uploads.
+→  Multi-region active-passive with DynamoDB Global Tables + Route 53 failover.
+→  DynamoDB PITR, WAF, and per-Lambda execution roles for production hardening.
 </a:t>
             </a:r>
             <a:endParaRPr lang="en-US" sz="1100" dirty="0"/>
@@ -7860,7 +7403,7 @@
           <a:bodyPr wrap="square" rtlCol="0" anchor="ctr"/>
           <a:lstStyle/>
           <a:p>
-            <a:pPr indent="0" marL="0">
+            <a:pPr marL="0" indent="0">
               <a:buNone/>
             </a:pPr>
             <a:r>
@@ -7899,7 +7442,7 @@
           <a:bodyPr wrap="square" rtlCol="0" anchor="ctr"/>
           <a:lstStyle/>
           <a:p>
-            <a:pPr algn="r" indent="0" marL="0">
+            <a:pPr marL="0" indent="0" algn="r">
               <a:buNone/>
             </a:pPr>
             <a:r>
@@ -8003,11 +7546,11 @@
           <a:bodyPr wrap="square" rtlCol="0" anchor="ctr"/>
           <a:lstStyle/>
           <a:p>
-            <a:pPr indent="0" marL="0">
-              <a:buNone/>
-            </a:pPr>
-            <a:r>
-              <a:rPr lang="en-US" sz="1200" b="1" spc="100" kern="0" dirty="0">
+            <a:pPr marL="0" indent="0">
+              <a:buNone/>
+            </a:pPr>
+            <a:r>
+              <a:rPr lang="en-US" sz="1200" b="1" kern="0" spc="100" dirty="0">
                 <a:solidFill>
                   <a:srgbClr val="FF9900"/>
                 </a:solidFill>
@@ -8042,7 +7585,7 @@
           <a:bodyPr wrap="square" rtlCol="0" anchor="ctr"/>
           <a:lstStyle/>
           <a:p>
-            <a:pPr indent="0" marL="0">
+            <a:pPr marL="0" indent="0">
               <a:buNone/>
             </a:pPr>
             <a:r>
@@ -8108,7 +7651,7 @@
           <a:bodyPr wrap="square" rtlCol="0" anchor="ctr"/>
           <a:lstStyle/>
           <a:p>
-            <a:pPr algn="ctr" indent="0" marL="0">
+            <a:pPr marL="0" indent="0" algn="ctr">
               <a:buNone/>
             </a:pPr>
             <a:r>
@@ -8147,7 +7690,7 @@
           <a:bodyPr wrap="square" rtlCol="0" anchor="ctr"/>
           <a:lstStyle/>
           <a:p>
-            <a:pPr algn="ctr" indent="0" marL="0">
+            <a:pPr marL="0" indent="0" algn="ctr">
               <a:buNone/>
             </a:pPr>
             <a:r>
@@ -8186,7 +7729,7 @@
           <a:bodyPr wrap="square" rtlCol="0" anchor="t"/>
           <a:lstStyle/>
           <a:p>
-            <a:pPr algn="ctr" indent="0" marL="0">
+            <a:pPr marL="0" indent="0" algn="ctr">
               <a:buNone/>
             </a:pPr>
             <a:r>
@@ -8252,7 +7795,7 @@
           <a:bodyPr wrap="square" rtlCol="0" anchor="ctr"/>
           <a:lstStyle/>
           <a:p>
-            <a:pPr algn="ctr" indent="0" marL="0">
+            <a:pPr marL="0" indent="0" algn="ctr">
               <a:buNone/>
             </a:pPr>
             <a:r>
@@ -8291,7 +7834,7 @@
           <a:bodyPr wrap="square" rtlCol="0" anchor="ctr"/>
           <a:lstStyle/>
           <a:p>
-            <a:pPr algn="ctr" indent="0" marL="0">
+            <a:pPr marL="0" indent="0" algn="ctr">
               <a:buNone/>
             </a:pPr>
             <a:r>
@@ -8330,7 +7873,7 @@
           <a:bodyPr wrap="square" rtlCol="0" anchor="t"/>
           <a:lstStyle/>
           <a:p>
-            <a:pPr algn="ctr" indent="0" marL="0">
+            <a:pPr marL="0" indent="0" algn="ctr">
               <a:buNone/>
             </a:pPr>
             <a:r>
@@ -8396,7 +7939,7 @@
           <a:bodyPr wrap="square" rtlCol="0" anchor="ctr"/>
           <a:lstStyle/>
           <a:p>
-            <a:pPr algn="ctr" indent="0" marL="0">
+            <a:pPr marL="0" indent="0" algn="ctr">
               <a:buNone/>
             </a:pPr>
             <a:r>
@@ -8435,7 +7978,7 @@
           <a:bodyPr wrap="square" rtlCol="0" anchor="ctr"/>
           <a:lstStyle/>
           <a:p>
-            <a:pPr algn="ctr" indent="0" marL="0">
+            <a:pPr marL="0" indent="0" algn="ctr">
               <a:buNone/>
             </a:pPr>
             <a:r>
@@ -8474,7 +8017,7 @@
           <a:bodyPr wrap="square" rtlCol="0" anchor="t"/>
           <a:lstStyle/>
           <a:p>
-            <a:pPr algn="ctr" indent="0" marL="0">
+            <a:pPr marL="0" indent="0" algn="ctr">
               <a:buNone/>
             </a:pPr>
             <a:r>
@@ -8540,7 +8083,7 @@
           <a:bodyPr wrap="square" rtlCol="0" anchor="ctr"/>
           <a:lstStyle/>
           <a:p>
-            <a:pPr algn="ctr" indent="0" marL="0">
+            <a:pPr marL="0" indent="0" algn="ctr">
               <a:buNone/>
             </a:pPr>
             <a:r>
@@ -8579,7 +8122,7 @@
           <a:bodyPr wrap="square" rtlCol="0" anchor="ctr"/>
           <a:lstStyle/>
           <a:p>
-            <a:pPr algn="ctr" indent="0" marL="0">
+            <a:pPr marL="0" indent="0" algn="ctr">
               <a:buNone/>
             </a:pPr>
             <a:r>
@@ -8618,7 +8161,7 @@
           <a:bodyPr wrap="square" rtlCol="0" anchor="t"/>
           <a:lstStyle/>
           <a:p>
-            <a:pPr algn="ctr" indent="0" marL="0">
+            <a:pPr marL="0" indent="0" algn="ctr">
               <a:buNone/>
             </a:pPr>
             <a:r>
@@ -8684,7 +8227,7 @@
           <a:bodyPr wrap="square" rtlCol="0" anchor="ctr"/>
           <a:lstStyle/>
           <a:p>
-            <a:pPr algn="ctr" indent="0" marL="0">
+            <a:pPr marL="0" indent="0" algn="ctr">
               <a:buNone/>
             </a:pPr>
             <a:r>
@@ -8723,7 +8266,7 @@
           <a:bodyPr wrap="square" rtlCol="0" anchor="ctr"/>
           <a:lstStyle/>
           <a:p>
-            <a:pPr algn="ctr" indent="0" marL="0">
+            <a:pPr marL="0" indent="0" algn="ctr">
               <a:buNone/>
             </a:pPr>
             <a:r>
@@ -8762,7 +8305,7 @@
           <a:bodyPr wrap="square" rtlCol="0" anchor="t"/>
           <a:lstStyle/>
           <a:p>
-            <a:pPr algn="ctr" indent="0" marL="0">
+            <a:pPr marL="0" indent="0" algn="ctr">
               <a:buNone/>
             </a:pPr>
             <a:r>
@@ -8828,7 +8371,7 @@
           <a:bodyPr wrap="square" rtlCol="0" anchor="ctr"/>
           <a:lstStyle/>
           <a:p>
-            <a:pPr algn="ctr" indent="0" marL="0">
+            <a:pPr marL="0" indent="0" algn="ctr">
               <a:buNone/>
             </a:pPr>
             <a:r>
@@ -8867,7 +8410,7 @@
           <a:bodyPr wrap="square" rtlCol="0" anchor="ctr"/>
           <a:lstStyle/>
           <a:p>
-            <a:pPr algn="ctr" indent="0" marL="0">
+            <a:pPr marL="0" indent="0" algn="ctr">
               <a:buNone/>
             </a:pPr>
             <a:r>
@@ -8906,7 +8449,7 @@
           <a:bodyPr wrap="square" rtlCol="0" anchor="t"/>
           <a:lstStyle/>
           <a:p>
-            <a:pPr algn="ctr" indent="0" marL="0">
+            <a:pPr marL="0" indent="0" algn="ctr">
               <a:buNone/>
             </a:pPr>
             <a:r>
@@ -8945,7 +8488,7 @@
           <a:bodyPr wrap="square" rtlCol="0" anchor="ctr"/>
           <a:lstStyle/>
           <a:p>
-            <a:pPr indent="0" marL="0">
+            <a:pPr marL="0" indent="0">
               <a:buNone/>
             </a:pPr>
             <a:r>
@@ -8984,7 +8527,7 @@
           <a:bodyPr wrap="square" rtlCol="0" anchor="ctr"/>
           <a:lstStyle/>
           <a:p>
-            <a:pPr algn="r" indent="0" marL="0">
+            <a:pPr marL="0" indent="0" algn="r">
               <a:buNone/>
             </a:pPr>
             <a:r>
@@ -9018,6 +8561,7 @@
         <a:solidFill>
           <a:srgbClr val="232F3E"/>
         </a:solidFill>
+        <a:effectLst/>
       </p:bgPr>
     </p:bg>
     <p:spTree>
@@ -9075,7 +8619,7 @@
           <a:bodyPr wrap="square" rtlCol="0" anchor="ctr"/>
           <a:lstStyle/>
           <a:p>
-            <a:pPr indent="0" marL="0">
+            <a:pPr marL="0" indent="0">
               <a:buNone/>
             </a:pPr>
             <a:r>
@@ -9114,7 +8658,7 @@
           <a:bodyPr wrap="square" rtlCol="0" anchor="ctr"/>
           <a:lstStyle/>
           <a:p>
-            <a:pPr indent="0" marL="0">
+            <a:pPr marL="0" indent="0">
               <a:buNone/>
             </a:pPr>
             <a:r>
@@ -9153,7 +8697,7 @@
           <a:bodyPr wrap="square" rtlCol="0" anchor="ctr"/>
           <a:lstStyle/>
           <a:p>
-            <a:pPr indent="0" marL="0">
+            <a:pPr marL="0" indent="0">
               <a:buNone/>
             </a:pPr>
             <a:r>
@@ -9192,7 +8736,7 @@
           <a:bodyPr wrap="square" rtlCol="0" anchor="ctr"/>
           <a:lstStyle/>
           <a:p>
-            <a:pPr indent="0" marL="0">
+            <a:pPr marL="0" indent="0">
               <a:buNone/>
             </a:pPr>
             <a:r>
@@ -9231,7 +8775,7 @@
           <a:bodyPr wrap="square" rtlCol="0" anchor="ctr"/>
           <a:lstStyle/>
           <a:p>
-            <a:pPr indent="0" marL="0">
+            <a:pPr marL="0" indent="0">
               <a:buNone/>
             </a:pPr>
             <a:r>
@@ -9270,7 +8814,7 @@
           <a:bodyPr wrap="square" rtlCol="0" anchor="ctr"/>
           <a:lstStyle/>
           <a:p>
-            <a:pPr indent="0" marL="0">
+            <a:pPr marL="0" indent="0">
               <a:buNone/>
             </a:pPr>
             <a:r>
@@ -9309,7 +8853,7 @@
           <a:bodyPr wrap="square" rtlCol="0" anchor="ctr"/>
           <a:lstStyle/>
           <a:p>
-            <a:pPr indent="0" marL="0">
+            <a:pPr marL="0" indent="0">
               <a:buNone/>
             </a:pPr>
             <a:r>
@@ -9348,7 +8892,7 @@
           <a:bodyPr wrap="square" rtlCol="0" anchor="ctr"/>
           <a:lstStyle/>
           <a:p>
-            <a:pPr indent="0" marL="0">
+            <a:pPr marL="0" indent="0">
               <a:buNone/>
             </a:pPr>
             <a:r>
@@ -9452,11 +8996,11 @@
           <a:bodyPr wrap="square" rtlCol="0" anchor="ctr"/>
           <a:lstStyle/>
           <a:p>
-            <a:pPr indent="0" marL="0">
-              <a:buNone/>
-            </a:pPr>
-            <a:r>
-              <a:rPr lang="en-US" sz="1200" b="1" spc="100" kern="0" dirty="0">
+            <a:pPr marL="0" indent="0">
+              <a:buNone/>
+            </a:pPr>
+            <a:r>
+              <a:rPr lang="en-US" sz="1200" b="1" kern="0" spc="100" dirty="0">
                 <a:solidFill>
                   <a:srgbClr val="FF9900"/>
                 </a:solidFill>
@@ -9491,7 +9035,7 @@
           <a:bodyPr wrap="square" rtlCol="0" anchor="ctr"/>
           <a:lstStyle/>
           <a:p>
-            <a:pPr indent="0" marL="0">
+            <a:pPr marL="0" indent="0">
               <a:buNone/>
             </a:pPr>
             <a:r>
@@ -9550,7 +9094,7 @@
           <a:bodyPr wrap="square" rtlCol="0" anchor="ctr"/>
           <a:lstStyle/>
           <a:p>
-            <a:pPr indent="0" marL="0">
+            <a:pPr marL="0" indent="0">
               <a:buNone/>
             </a:pPr>
             <a:r>
@@ -9589,7 +9133,7 @@
           <a:bodyPr wrap="square" rtlCol="0" anchor="ctr"/>
           <a:lstStyle/>
           <a:p>
-            <a:pPr indent="0" marL="0">
+            <a:pPr marL="0" indent="0">
               <a:buNone/>
             </a:pPr>
             <a:r>
@@ -9648,7 +9192,7 @@
           <a:bodyPr wrap="square" rtlCol="0" anchor="ctr"/>
           <a:lstStyle/>
           <a:p>
-            <a:pPr indent="0" marL="0">
+            <a:pPr marL="0" indent="0">
               <a:buNone/>
             </a:pPr>
             <a:r>
@@ -9687,7 +9231,7 @@
           <a:bodyPr wrap="square" rtlCol="0" anchor="ctr"/>
           <a:lstStyle/>
           <a:p>
-            <a:pPr indent="0" marL="0">
+            <a:pPr marL="0" indent="0">
               <a:buNone/>
             </a:pPr>
             <a:r>
@@ -9746,7 +9290,7 @@
           <a:bodyPr wrap="square" rtlCol="0" anchor="ctr"/>
           <a:lstStyle/>
           <a:p>
-            <a:pPr indent="0" marL="0">
+            <a:pPr marL="0" indent="0">
               <a:buNone/>
             </a:pPr>
             <a:r>
@@ -9785,7 +9329,7 @@
           <a:bodyPr wrap="square" rtlCol="0" anchor="ctr"/>
           <a:lstStyle/>
           <a:p>
-            <a:pPr indent="0" marL="0">
+            <a:pPr marL="0" indent="0">
               <a:buNone/>
             </a:pPr>
             <a:r>
@@ -9844,7 +9388,7 @@
           <a:bodyPr wrap="square" rtlCol="0" anchor="ctr"/>
           <a:lstStyle/>
           <a:p>
-            <a:pPr indent="0" marL="0">
+            <a:pPr marL="0" indent="0">
               <a:buNone/>
             </a:pPr>
             <a:r>
@@ -9883,7 +9427,7 @@
           <a:bodyPr wrap="square" rtlCol="0" anchor="ctr"/>
           <a:lstStyle/>
           <a:p>
-            <a:pPr indent="0" marL="0">
+            <a:pPr marL="0" indent="0">
               <a:buNone/>
             </a:pPr>
             <a:r>
@@ -9942,7 +9486,7 @@
           <a:bodyPr wrap="square" rtlCol="0" anchor="ctr"/>
           <a:lstStyle/>
           <a:p>
-            <a:pPr indent="0" marL="0">
+            <a:pPr marL="0" indent="0">
               <a:buNone/>
             </a:pPr>
             <a:r>
@@ -9981,7 +9525,7 @@
           <a:bodyPr wrap="square" rtlCol="0" anchor="ctr"/>
           <a:lstStyle/>
           <a:p>
-            <a:pPr indent="0" marL="0">
+            <a:pPr marL="0" indent="0">
               <a:buNone/>
             </a:pPr>
             <a:r>
@@ -10020,7 +9564,7 @@
           <a:bodyPr wrap="square" rtlCol="0" anchor="t"/>
           <a:lstStyle/>
           <a:p>
-            <a:pPr indent="0" marL="0">
+            <a:pPr marL="0" indent="0">
               <a:lnSpc>
                 <a:spcPct val="115000"/>
               </a:lnSpc>
@@ -10037,12 +9581,6 @@
               </a:rPr>
               <a:t>Instant match scores</a:t>
             </a:r>
-            <a:pPr indent="0" marL="0">
-              <a:lnSpc>
-                <a:spcPct val="115000"/>
-              </a:lnSpc>
-              <a:buNone/>
-            </a:pPr>
             <a:r>
               <a:rPr lang="en-US" sz="1300" dirty="0">
                 <a:solidFill>
@@ -10055,12 +9593,6 @@
               <a:t> — 0–100 against any job description, generated in about 90 seconds end-to-end.
 </a:t>
             </a:r>
-            <a:pPr indent="0" marL="0">
-              <a:lnSpc>
-                <a:spcPct val="115000"/>
-              </a:lnSpc>
-              <a:buNone/>
-            </a:pPr>
             <a:r>
               <a:rPr lang="en-US" sz="1300" b="1" dirty="0">
                 <a:solidFill>
@@ -10072,12 +9604,6 @@
               </a:rPr>
               <a:t>Skill gap analysis</a:t>
             </a:r>
-            <a:pPr indent="0" marL="0">
-              <a:lnSpc>
-                <a:spcPct val="115000"/>
-              </a:lnSpc>
-              <a:buNone/>
-            </a:pPr>
             <a:r>
               <a:rPr lang="en-US" sz="1300" dirty="0">
                 <a:solidFill>
@@ -10090,12 +9616,6 @@
               <a:t> — matched skills, strengths, gaps, and concrete improvement recommendations.
 </a:t>
             </a:r>
-            <a:pPr indent="0" marL="0">
-              <a:lnSpc>
-                <a:spcPct val="115000"/>
-              </a:lnSpc>
-              <a:buNone/>
-            </a:pPr>
             <a:r>
               <a:rPr lang="en-US" sz="1300" b="1" dirty="0">
                 <a:solidFill>
@@ -10107,12 +9627,6 @@
               </a:rPr>
               <a:t>Ranked candidate lists</a:t>
             </a:r>
-            <a:pPr indent="0" marL="0">
-              <a:lnSpc>
-                <a:spcPct val="115000"/>
-              </a:lnSpc>
-              <a:buNone/>
-            </a:pPr>
             <a:r>
               <a:rPr lang="en-US" sz="1300" dirty="0">
                 <a:solidFill>
@@ -10149,7 +9663,7 @@
           <a:bodyPr wrap="square" rtlCol="0" anchor="ctr"/>
           <a:lstStyle/>
           <a:p>
-            <a:pPr indent="0" marL="0">
+            <a:pPr marL="0" indent="0">
               <a:buNone/>
             </a:pPr>
             <a:r>
@@ -10188,7 +9702,7 @@
           <a:bodyPr wrap="square" rtlCol="0" anchor="ctr"/>
           <a:lstStyle/>
           <a:p>
-            <a:pPr algn="r" indent="0" marL="0">
+            <a:pPr marL="0" indent="0" algn="r">
               <a:buNone/>
             </a:pPr>
             <a:r>
@@ -10292,11 +9806,11 @@
           <a:bodyPr wrap="square" rtlCol="0" anchor="ctr"/>
           <a:lstStyle/>
           <a:p>
-            <a:pPr indent="0" marL="0">
-              <a:buNone/>
-            </a:pPr>
-            <a:r>
-              <a:rPr lang="en-US" sz="1200" b="1" spc="100" kern="0" dirty="0">
+            <a:pPr marL="0" indent="0">
+              <a:buNone/>
+            </a:pPr>
+            <a:r>
+              <a:rPr lang="en-US" sz="1200" b="1" kern="0" spc="100" dirty="0">
                 <a:solidFill>
                   <a:srgbClr val="FF9900"/>
                 </a:solidFill>
@@ -10331,7 +9845,7 @@
           <a:bodyPr wrap="square" rtlCol="0" anchor="ctr"/>
           <a:lstStyle/>
           <a:p>
-            <a:pPr indent="0" marL="0">
+            <a:pPr marL="0" indent="0">
               <a:buNone/>
             </a:pPr>
             <a:r>
@@ -10417,7 +9931,7 @@
           <a:bodyPr wrap="square" rtlCol="0" anchor="ctr"/>
           <a:lstStyle/>
           <a:p>
-            <a:pPr indent="0" marL="0">
+            <a:pPr marL="0" indent="0">
               <a:buNone/>
             </a:pPr>
             <a:r>
@@ -10456,7 +9970,7 @@
           <a:bodyPr wrap="square" rtlCol="0" anchor="t"/>
           <a:lstStyle/>
           <a:p>
-            <a:pPr indent="0" marL="0">
+            <a:pPr marL="0" indent="0">
               <a:lnSpc>
                 <a:spcPct val="110000"/>
               </a:lnSpc>
@@ -10545,7 +10059,7 @@
           <a:bodyPr wrap="square" rtlCol="0" anchor="ctr"/>
           <a:lstStyle/>
           <a:p>
-            <a:pPr indent="0" marL="0">
+            <a:pPr marL="0" indent="0">
               <a:buNone/>
             </a:pPr>
             <a:r>
@@ -10584,7 +10098,7 @@
           <a:bodyPr wrap="square" rtlCol="0" anchor="t"/>
           <a:lstStyle/>
           <a:p>
-            <a:pPr indent="0" marL="0">
+            <a:pPr marL="0" indent="0">
               <a:lnSpc>
                 <a:spcPct val="110000"/>
               </a:lnSpc>
@@ -10673,7 +10187,7 @@
           <a:bodyPr wrap="square" rtlCol="0" anchor="ctr"/>
           <a:lstStyle/>
           <a:p>
-            <a:pPr indent="0" marL="0">
+            <a:pPr marL="0" indent="0">
               <a:buNone/>
             </a:pPr>
             <a:r>
@@ -10712,7 +10226,7 @@
           <a:bodyPr wrap="square" rtlCol="0" anchor="t"/>
           <a:lstStyle/>
           <a:p>
-            <a:pPr indent="0" marL="0">
+            <a:pPr marL="0" indent="0">
               <a:lnSpc>
                 <a:spcPct val="110000"/>
               </a:lnSpc>
@@ -10801,7 +10315,7 @@
           <a:bodyPr wrap="square" rtlCol="0" anchor="ctr"/>
           <a:lstStyle/>
           <a:p>
-            <a:pPr indent="0" marL="0">
+            <a:pPr marL="0" indent="0">
               <a:buNone/>
             </a:pPr>
             <a:r>
@@ -10840,7 +10354,7 @@
           <a:bodyPr wrap="square" rtlCol="0" anchor="t"/>
           <a:lstStyle/>
           <a:p>
-            <a:pPr indent="0" marL="0">
+            <a:pPr marL="0" indent="0">
               <a:lnSpc>
                 <a:spcPct val="110000"/>
               </a:lnSpc>
@@ -10929,7 +10443,7 @@
           <a:bodyPr wrap="square" rtlCol="0" anchor="ctr"/>
           <a:lstStyle/>
           <a:p>
-            <a:pPr indent="0" marL="0">
+            <a:pPr marL="0" indent="0">
               <a:buNone/>
             </a:pPr>
             <a:r>
@@ -10968,7 +10482,7 @@
           <a:bodyPr wrap="square" rtlCol="0" anchor="t"/>
           <a:lstStyle/>
           <a:p>
-            <a:pPr indent="0" marL="0">
+            <a:pPr marL="0" indent="0">
               <a:lnSpc>
                 <a:spcPct val="110000"/>
               </a:lnSpc>
@@ -11057,7 +10571,7 @@
           <a:bodyPr wrap="square" rtlCol="0" anchor="ctr"/>
           <a:lstStyle/>
           <a:p>
-            <a:pPr indent="0" marL="0">
+            <a:pPr marL="0" indent="0">
               <a:buNone/>
             </a:pPr>
             <a:r>
@@ -11096,7 +10610,7 @@
           <a:bodyPr wrap="square" rtlCol="0" anchor="t"/>
           <a:lstStyle/>
           <a:p>
-            <a:pPr indent="0" marL="0">
+            <a:pPr marL="0" indent="0">
               <a:lnSpc>
                 <a:spcPct val="110000"/>
               </a:lnSpc>
@@ -11138,7 +10652,7 @@
           <a:bodyPr wrap="square" rtlCol="0" anchor="ctr"/>
           <a:lstStyle/>
           <a:p>
-            <a:pPr indent="0" marL="0">
+            <a:pPr marL="0" indent="0">
               <a:buNone/>
             </a:pPr>
             <a:r>
@@ -11177,7 +10691,7 @@
           <a:bodyPr wrap="square" rtlCol="0" anchor="ctr"/>
           <a:lstStyle/>
           <a:p>
-            <a:pPr algn="r" indent="0" marL="0">
+            <a:pPr marL="0" indent="0" algn="r">
               <a:buNone/>
             </a:pPr>
             <a:r>
@@ -11281,11 +10795,11 @@
           <a:bodyPr wrap="square" rtlCol="0" anchor="ctr"/>
           <a:lstStyle/>
           <a:p>
-            <a:pPr indent="0" marL="0">
-              <a:buNone/>
-            </a:pPr>
-            <a:r>
-              <a:rPr lang="en-US" sz="1200" b="1" spc="100" kern="0" dirty="0">
+            <a:pPr marL="0" indent="0">
+              <a:buNone/>
+            </a:pPr>
+            <a:r>
+              <a:rPr lang="en-US" sz="1200" b="1" kern="0" spc="100" dirty="0">
                 <a:solidFill>
                   <a:srgbClr val="FF9900"/>
                 </a:solidFill>
@@ -11320,7 +10834,7 @@
           <a:bodyPr wrap="square" rtlCol="0" anchor="ctr"/>
           <a:lstStyle/>
           <a:p>
-            <a:pPr indent="0" marL="0">
+            <a:pPr marL="0" indent="0">
               <a:buNone/>
             </a:pPr>
             <a:r>
@@ -11335,110 +10849,117 @@
               <a:t>End-to-End Serverless Design</a:t>
             </a:r>
             <a:endParaRPr lang="en-US" sz="2800" dirty="0"/>
+          </a:p>
+        </p:txBody>
+      </p:sp>
+      <p:sp>
+        <p:nvSpPr>
+          <p:cNvPr id="7" name="Text 4"/>
+          <p:cNvSpPr/>
+          <p:nvPr/>
+        </p:nvSpPr>
+        <p:spPr>
+          <a:xfrm>
+            <a:off x="365760" y="6537960"/>
+            <a:ext cx="8229600" cy="274320"/>
+          </a:xfrm>
+          <a:prstGeom prst="rect">
+            <a:avLst/>
+          </a:prstGeom>
+          <a:noFill/>
+          <a:ln/>
+        </p:spPr>
+        <p:txBody>
+          <a:bodyPr wrap="square" rtlCol="0" anchor="ctr"/>
+          <a:lstStyle/>
+          <a:p>
+            <a:pPr marL="0" indent="0">
+              <a:buNone/>
+            </a:pPr>
+            <a:r>
+              <a:rPr lang="en-US" sz="900" dirty="0">
+                <a:solidFill>
+                  <a:srgbClr val="5A6B7B"/>
+                </a:solidFill>
+                <a:latin typeface="Calibri" pitchFamily="34" charset="0"/>
+                <a:ea typeface="Calibri" pitchFamily="34" charset="-122"/>
+                <a:cs typeface="Calibri" pitchFamily="34" charset="-120"/>
+              </a:rPr>
+              <a:t>AI Resume Analyzer &amp; Job Matcher  |  CSCI 5411 – Advanced Cloud Architecting</a:t>
+            </a:r>
+            <a:endParaRPr lang="en-US" sz="900" dirty="0"/>
+          </a:p>
+        </p:txBody>
+      </p:sp>
+      <p:sp>
+        <p:nvSpPr>
+          <p:cNvPr id="8" name="Text 5"/>
+          <p:cNvSpPr/>
+          <p:nvPr/>
+        </p:nvSpPr>
+        <p:spPr>
+          <a:xfrm>
+            <a:off x="11521440" y="6537960"/>
+            <a:ext cx="365760" cy="274320"/>
+          </a:xfrm>
+          <a:prstGeom prst="rect">
+            <a:avLst/>
+          </a:prstGeom>
+          <a:noFill/>
+          <a:ln/>
+        </p:spPr>
+        <p:txBody>
+          <a:bodyPr wrap="square" rtlCol="0" anchor="ctr"/>
+          <a:lstStyle/>
+          <a:p>
+            <a:pPr marL="0" indent="0" algn="r">
+              <a:buNone/>
+            </a:pPr>
+            <a:r>
+              <a:rPr lang="en-US" sz="900" dirty="0">
+                <a:solidFill>
+                  <a:srgbClr val="5A6B7B"/>
+                </a:solidFill>
+                <a:latin typeface="Calibri" pitchFamily="34" charset="0"/>
+                <a:ea typeface="Calibri" pitchFamily="34" charset="-122"/>
+                <a:cs typeface="Calibri" pitchFamily="34" charset="-120"/>
+              </a:rPr>
+              <a:t>4</a:t>
+            </a:r>
+            <a:endParaRPr lang="en-US" sz="900" dirty="0"/>
           </a:p>
         </p:txBody>
       </p:sp>
       <p:pic>
         <p:nvPicPr>
-          <p:cNvPr id="6" name="Image 0" descr="c:\Users\patel\OneDrive - Dalhousie University\Desktop\Classwork\Sem 2\Adv Cloud\Project\docxs\diagrams\high-level.png">    </p:cNvPr>
+          <p:cNvPr id="12" name="Picture 11">
+            <a:extLst>
+              <a:ext uri="{FF2B5EF4-FFF2-40B4-BE49-F238E27FC236}">
+                <a16:creationId xmlns:a16="http://schemas.microsoft.com/office/drawing/2014/main" id="{7C8D2087-0C22-0270-B4E7-CB2F98FFD7DA}"/>
+              </a:ext>
+            </a:extLst>
+          </p:cNvPr>
           <p:cNvPicPr>
             <a:picLocks noChangeAspect="1"/>
           </p:cNvPicPr>
           <p:nvPr/>
         </p:nvPicPr>
         <p:blipFill>
-          <a:blip r:embed="rId1"/>
-          <a:srcRect l="0" r="0" t="0" b="0"/>
-          <a:stretch/>
+          <a:blip r:embed="rId3"/>
+          <a:stretch>
+            <a:fillRect/>
+          </a:stretch>
         </p:blipFill>
         <p:spPr>
           <a:xfrm>
-            <a:off x="320040" y="1234440"/>
-            <a:ext cx="11521440" cy="5349240"/>
+            <a:off x="408214" y="1179576"/>
+            <a:ext cx="11185071" cy="5090595"/>
           </a:xfrm>
           <a:prstGeom prst="rect">
             <a:avLst/>
           </a:prstGeom>
         </p:spPr>
       </p:pic>
-      <p:sp>
-        <p:nvSpPr>
-          <p:cNvPr id="7" name="Text 4"/>
-          <p:cNvSpPr/>
-          <p:nvPr/>
-        </p:nvSpPr>
-        <p:spPr>
-          <a:xfrm>
-            <a:off x="365760" y="6537960"/>
-            <a:ext cx="8229600" cy="274320"/>
-          </a:xfrm>
-          <a:prstGeom prst="rect">
-            <a:avLst/>
-          </a:prstGeom>
-          <a:noFill/>
-          <a:ln/>
-        </p:spPr>
-        <p:txBody>
-          <a:bodyPr wrap="square" rtlCol="0" anchor="ctr"/>
-          <a:lstStyle/>
-          <a:p>
-            <a:pPr indent="0" marL="0">
-              <a:buNone/>
-            </a:pPr>
-            <a:r>
-              <a:rPr lang="en-US" sz="900" dirty="0">
-                <a:solidFill>
-                  <a:srgbClr val="5A6B7B"/>
-                </a:solidFill>
-                <a:latin typeface="Calibri" pitchFamily="34" charset="0"/>
-                <a:ea typeface="Calibri" pitchFamily="34" charset="-122"/>
-                <a:cs typeface="Calibri" pitchFamily="34" charset="-120"/>
-              </a:rPr>
-              <a:t>AI Resume Analyzer &amp; Job Matcher  |  CSCI 5411 – Advanced Cloud Architecting</a:t>
-            </a:r>
-            <a:endParaRPr lang="en-US" sz="900" dirty="0"/>
-          </a:p>
-        </p:txBody>
-      </p:sp>
-      <p:sp>
-        <p:nvSpPr>
-          <p:cNvPr id="8" name="Text 5"/>
-          <p:cNvSpPr/>
-          <p:nvPr/>
-        </p:nvSpPr>
-        <p:spPr>
-          <a:xfrm>
-            <a:off x="11521440" y="6537960"/>
-            <a:ext cx="365760" cy="274320"/>
-          </a:xfrm>
-          <a:prstGeom prst="rect">
-            <a:avLst/>
-          </a:prstGeom>
-          <a:noFill/>
-          <a:ln/>
-        </p:spPr>
-        <p:txBody>
-          <a:bodyPr wrap="square" rtlCol="0" anchor="ctr"/>
-          <a:lstStyle/>
-          <a:p>
-            <a:pPr algn="r" indent="0" marL="0">
-              <a:buNone/>
-            </a:pPr>
-            <a:r>
-              <a:rPr lang="en-US" sz="900" dirty="0">
-                <a:solidFill>
-                  <a:srgbClr val="5A6B7B"/>
-                </a:solidFill>
-                <a:latin typeface="Calibri" pitchFamily="34" charset="0"/>
-                <a:ea typeface="Calibri" pitchFamily="34" charset="-122"/>
-                <a:cs typeface="Calibri" pitchFamily="34" charset="-120"/>
-              </a:rPr>
-              <a:t>4</a:t>
-            </a:r>
-            <a:endParaRPr lang="en-US" sz="900" dirty="0"/>
-          </a:p>
-        </p:txBody>
-      </p:sp>
     </p:spTree>
   </p:cSld>
   <p:clrMapOvr>
@@ -11525,11 +11046,11 @@
           <a:bodyPr wrap="square" rtlCol="0" anchor="ctr"/>
           <a:lstStyle/>
           <a:p>
-            <a:pPr indent="0" marL="0">
-              <a:buNone/>
-            </a:pPr>
-            <a:r>
-              <a:rPr lang="en-US" sz="1200" b="1" spc="100" kern="0" dirty="0">
+            <a:pPr marL="0" indent="0">
+              <a:buNone/>
+            </a:pPr>
+            <a:r>
+              <a:rPr lang="en-US" sz="1200" b="1" kern="0" spc="100" dirty="0">
                 <a:solidFill>
                   <a:srgbClr val="FF9900"/>
                 </a:solidFill>
@@ -11564,7 +11085,7 @@
           <a:bodyPr wrap="square" rtlCol="0" anchor="ctr"/>
           <a:lstStyle/>
           <a:p>
-            <a:pPr indent="0" marL="0">
+            <a:pPr marL="0" indent="0">
               <a:buNone/>
             </a:pPr>
             <a:r>
@@ -11605,9 +11126,27 @@
             <a:tbl>
               <a:tblPr/>
               <a:tblGrid>
-                <a:gridCol w="2011680"/>
-                <a:gridCol w="3108960"/>
-                <a:gridCol w="6263640"/>
+                <a:gridCol w="2011680">
+                  <a:extLst>
+                    <a:ext uri="{9D8B030D-6E8A-4147-A177-3AD203B41FA5}">
+                      <a16:colId xmlns:a16="http://schemas.microsoft.com/office/drawing/2014/main" val="20000"/>
+                    </a:ext>
+                  </a:extLst>
+                </a:gridCol>
+                <a:gridCol w="3108960">
+                  <a:extLst>
+                    <a:ext uri="{9D8B030D-6E8A-4147-A177-3AD203B41FA5}">
+                      <a16:colId xmlns:a16="http://schemas.microsoft.com/office/drawing/2014/main" val="20001"/>
+                    </a:ext>
+                  </a:extLst>
+                </a:gridCol>
+                <a:gridCol w="6263640">
+                  <a:extLst>
+                    <a:ext uri="{9D8B030D-6E8A-4147-A177-3AD203B41FA5}">
+                      <a16:colId xmlns:a16="http://schemas.microsoft.com/office/drawing/2014/main" val="20002"/>
+                    </a:ext>
+                  </a:extLst>
+                </a:gridCol>
               </a:tblGrid>
               <a:tr h="402336">
                 <a:tc>
@@ -11615,7 +11154,7 @@
                     <a:bodyPr/>
                     <a:lstStyle/>
                     <a:p>
-                      <a:pPr indent="0" marL="0">
+                      <a:pPr marL="0" indent="0">
                         <a:buNone/>
                       </a:pPr>
                       <a:r>
@@ -11629,7 +11168,7 @@
                       <a:endParaRPr lang="en-US" sz="1150" dirty="0"/>
                     </a:p>
                   </a:txBody>
-                  <a:tcPr marL="91440" marR="91440" marT="45720" marB="45720" anchor="ctr">
+                  <a:tcPr anchor="ctr">
                     <a:lnL w="9525" cap="flat" cmpd="sng" algn="ctr">
                       <a:solidFill>
                         <a:srgbClr val="E3E7EA"/>
@@ -11676,7 +11215,7 @@
                     <a:bodyPr/>
                     <a:lstStyle/>
                     <a:p>
-                      <a:pPr indent="0" marL="0">
+                      <a:pPr marL="0" indent="0">
                         <a:buNone/>
                       </a:pPr>
                       <a:r>
@@ -11690,7 +11229,7 @@
                       <a:endParaRPr lang="en-US" sz="1150" dirty="0"/>
                     </a:p>
                   </a:txBody>
-                  <a:tcPr marL="91440" marR="91440" marT="45720" marB="45720" anchor="ctr">
+                  <a:tcPr anchor="ctr">
                     <a:lnL w="9525" cap="flat" cmpd="sng" algn="ctr">
                       <a:solidFill>
                         <a:srgbClr val="E3E7EA"/>
@@ -11737,7 +11276,7 @@
                     <a:bodyPr/>
                     <a:lstStyle/>
                     <a:p>
-                      <a:pPr indent="0" marL="0">
+                      <a:pPr marL="0" indent="0">
                         <a:buNone/>
                       </a:pPr>
                       <a:r>
@@ -11751,7 +11290,7 @@
                       <a:endParaRPr lang="en-US" sz="1150" dirty="0"/>
                     </a:p>
                   </a:txBody>
-                  <a:tcPr marL="91440" marR="91440" marT="45720" marB="45720" anchor="ctr">
+                  <a:tcPr anchor="ctr">
                     <a:lnL w="9525" cap="flat" cmpd="sng" algn="ctr">
                       <a:solidFill>
                         <a:srgbClr val="E3E7EA"/>
@@ -11793,6 +11332,11 @@
                     </a:solidFill>
                   </a:tcPr>
                 </a:tc>
+                <a:extLst>
+                  <a:ext uri="{0D108BD9-81ED-4DB2-BD59-A6C34878D82A}">
+                    <a16:rowId xmlns:a16="http://schemas.microsoft.com/office/drawing/2014/main" val="10000"/>
+                  </a:ext>
+                </a:extLst>
               </a:tr>
               <a:tr h="402336">
                 <a:tc>
@@ -11800,7 +11344,7 @@
                     <a:bodyPr/>
                     <a:lstStyle/>
                     <a:p>
-                      <a:pPr indent="0" marL="0">
+                      <a:pPr marL="0" indent="0">
                         <a:buNone/>
                       </a:pPr>
                       <a:r>
@@ -11814,7 +11358,7 @@
                       <a:endParaRPr lang="en-US" sz="1050" dirty="0"/>
                     </a:p>
                   </a:txBody>
-                  <a:tcPr marL="91440" marR="91440" marT="45720" marB="45720" anchor="ctr">
+                  <a:tcPr anchor="ctr">
                     <a:lnL w="9525" cap="flat" cmpd="sng" algn="ctr">
                       <a:solidFill>
                         <a:srgbClr val="E3E7EA"/>
@@ -11861,7 +11405,7 @@
                     <a:bodyPr/>
                     <a:lstStyle/>
                     <a:p>
-                      <a:pPr indent="0" marL="0">
+                      <a:pPr marL="0" indent="0">
                         <a:buNone/>
                       </a:pPr>
                       <a:r>
@@ -11875,7 +11419,7 @@
                       <a:endParaRPr lang="en-US" sz="1050" dirty="0"/>
                     </a:p>
                   </a:txBody>
-                  <a:tcPr marL="91440" marR="91440" marT="45720" marB="45720" anchor="ctr">
+                  <a:tcPr anchor="ctr">
                     <a:lnL w="9525" cap="flat" cmpd="sng" algn="ctr">
                       <a:solidFill>
                         <a:srgbClr val="E3E7EA"/>
@@ -11922,7 +11466,7 @@
                     <a:bodyPr/>
                     <a:lstStyle/>
                     <a:p>
-                      <a:pPr indent="0" marL="0">
+                      <a:pPr marL="0" indent="0">
                         <a:buNone/>
                       </a:pPr>
                       <a:r>
@@ -11936,7 +11480,7 @@
                       <a:endParaRPr lang="en-US" sz="1050" dirty="0"/>
                     </a:p>
                   </a:txBody>
-                  <a:tcPr marL="91440" marR="91440" marT="45720" marB="45720" anchor="ctr">
+                  <a:tcPr anchor="ctr">
                     <a:lnL w="9525" cap="flat" cmpd="sng" algn="ctr">
                       <a:solidFill>
                         <a:srgbClr val="E3E7EA"/>
@@ -11978,6 +11522,11 @@
                     </a:solidFill>
                   </a:tcPr>
                 </a:tc>
+                <a:extLst>
+                  <a:ext uri="{0D108BD9-81ED-4DB2-BD59-A6C34878D82A}">
+                    <a16:rowId xmlns:a16="http://schemas.microsoft.com/office/drawing/2014/main" val="10001"/>
+                  </a:ext>
+                </a:extLst>
               </a:tr>
               <a:tr h="402336">
                 <a:tc>
@@ -11985,7 +11534,7 @@
                     <a:bodyPr/>
                     <a:lstStyle/>
                     <a:p>
-                      <a:pPr indent="0" marL="0">
+                      <a:pPr marL="0" indent="0">
                         <a:buNone/>
                       </a:pPr>
                       <a:r>
@@ -11999,7 +11548,7 @@
                       <a:endParaRPr lang="en-US" sz="1050" dirty="0"/>
                     </a:p>
                   </a:txBody>
-                  <a:tcPr marL="91440" marR="91440" marT="45720" marB="45720" anchor="ctr">
+                  <a:tcPr anchor="ctr">
                     <a:lnL w="9525" cap="flat" cmpd="sng" algn="ctr">
                       <a:solidFill>
                         <a:srgbClr val="E3E7EA"/>
@@ -12046,7 +11595,7 @@
                     <a:bodyPr/>
                     <a:lstStyle/>
                     <a:p>
-                      <a:pPr indent="0" marL="0">
+                      <a:pPr marL="0" indent="0">
                         <a:buNone/>
                       </a:pPr>
                       <a:r>
@@ -12060,7 +11609,7 @@
                       <a:endParaRPr lang="en-US" sz="1050" dirty="0"/>
                     </a:p>
                   </a:txBody>
-                  <a:tcPr marL="91440" marR="91440" marT="45720" marB="45720" anchor="ctr">
+                  <a:tcPr anchor="ctr">
                     <a:lnL w="9525" cap="flat" cmpd="sng" algn="ctr">
                       <a:solidFill>
                         <a:srgbClr val="E3E7EA"/>
@@ -12107,7 +11656,7 @@
                     <a:bodyPr/>
                     <a:lstStyle/>
                     <a:p>
-                      <a:pPr indent="0" marL="0">
+                      <a:pPr marL="0" indent="0">
                         <a:buNone/>
                       </a:pPr>
                       <a:r>
@@ -12121,7 +11670,7 @@
                       <a:endParaRPr lang="en-US" sz="1050" dirty="0"/>
                     </a:p>
                   </a:txBody>
-                  <a:tcPr marL="91440" marR="91440" marT="45720" marB="45720" anchor="ctr">
+                  <a:tcPr anchor="ctr">
                     <a:lnL w="9525" cap="flat" cmpd="sng" algn="ctr">
                       <a:solidFill>
                         <a:srgbClr val="E3E7EA"/>
@@ -12163,6 +11712,11 @@
                     </a:solidFill>
                   </a:tcPr>
                 </a:tc>
+                <a:extLst>
+                  <a:ext uri="{0D108BD9-81ED-4DB2-BD59-A6C34878D82A}">
+                    <a16:rowId xmlns:a16="http://schemas.microsoft.com/office/drawing/2014/main" val="10002"/>
+                  </a:ext>
+                </a:extLst>
               </a:tr>
               <a:tr h="402336">
                 <a:tc>
@@ -12170,7 +11724,7 @@
                     <a:bodyPr/>
                     <a:lstStyle/>
                     <a:p>
-                      <a:pPr indent="0" marL="0">
+                      <a:pPr marL="0" indent="0">
                         <a:buNone/>
                       </a:pPr>
                       <a:r>
@@ -12184,7 +11738,7 @@
                       <a:endParaRPr lang="en-US" sz="1050" dirty="0"/>
                     </a:p>
                   </a:txBody>
-                  <a:tcPr marL="91440" marR="91440" marT="45720" marB="45720" anchor="ctr">
+                  <a:tcPr anchor="ctr">
                     <a:lnL w="9525" cap="flat" cmpd="sng" algn="ctr">
                       <a:solidFill>
                         <a:srgbClr val="E3E7EA"/>
@@ -12231,7 +11785,7 @@
                     <a:bodyPr/>
                     <a:lstStyle/>
                     <a:p>
-                      <a:pPr indent="0" marL="0">
+                      <a:pPr marL="0" indent="0">
                         <a:buNone/>
                       </a:pPr>
                       <a:r>
@@ -12245,7 +11799,7 @@
                       <a:endParaRPr lang="en-US" sz="1050" dirty="0"/>
                     </a:p>
                   </a:txBody>
-                  <a:tcPr marL="91440" marR="91440" marT="45720" marB="45720" anchor="ctr">
+                  <a:tcPr anchor="ctr">
                     <a:lnL w="9525" cap="flat" cmpd="sng" algn="ctr">
                       <a:solidFill>
                         <a:srgbClr val="E3E7EA"/>
@@ -12292,7 +11846,7 @@
                     <a:bodyPr/>
                     <a:lstStyle/>
                     <a:p>
-                      <a:pPr indent="0" marL="0">
+                      <a:pPr marL="0" indent="0">
                         <a:buNone/>
                       </a:pPr>
                       <a:r>
@@ -12306,7 +11860,7 @@
                       <a:endParaRPr lang="en-US" sz="1050" dirty="0"/>
                     </a:p>
                   </a:txBody>
-                  <a:tcPr marL="91440" marR="91440" marT="45720" marB="45720" anchor="ctr">
+                  <a:tcPr anchor="ctr">
                     <a:lnL w="9525" cap="flat" cmpd="sng" algn="ctr">
                       <a:solidFill>
                         <a:srgbClr val="E3E7EA"/>
@@ -12348,6 +11902,11 @@
                     </a:solidFill>
                   </a:tcPr>
                 </a:tc>
+                <a:extLst>
+                  <a:ext uri="{0D108BD9-81ED-4DB2-BD59-A6C34878D82A}">
+                    <a16:rowId xmlns:a16="http://schemas.microsoft.com/office/drawing/2014/main" val="10003"/>
+                  </a:ext>
+                </a:extLst>
               </a:tr>
               <a:tr h="402336">
                 <a:tc>
@@ -12355,7 +11914,7 @@
                     <a:bodyPr/>
                     <a:lstStyle/>
                     <a:p>
-                      <a:pPr indent="0" marL="0">
+                      <a:pPr marL="0" indent="0">
                         <a:buNone/>
                       </a:pPr>
                       <a:r>
@@ -12369,7 +11928,7 @@
                       <a:endParaRPr lang="en-US" sz="1050" dirty="0"/>
                     </a:p>
                   </a:txBody>
-                  <a:tcPr marL="91440" marR="91440" marT="45720" marB="45720" anchor="ctr">
+                  <a:tcPr anchor="ctr">
                     <a:lnL w="9525" cap="flat" cmpd="sng" algn="ctr">
                       <a:solidFill>
                         <a:srgbClr val="E3E7EA"/>
@@ -12416,7 +11975,7 @@
                     <a:bodyPr/>
                     <a:lstStyle/>
                     <a:p>
-                      <a:pPr indent="0" marL="0">
+                      <a:pPr marL="0" indent="0">
                         <a:buNone/>
                       </a:pPr>
                       <a:r>
@@ -12430,7 +11989,7 @@
                       <a:endParaRPr lang="en-US" sz="1050" dirty="0"/>
                     </a:p>
                   </a:txBody>
-                  <a:tcPr marL="91440" marR="91440" marT="45720" marB="45720" anchor="ctr">
+                  <a:tcPr anchor="ctr">
                     <a:lnL w="9525" cap="flat" cmpd="sng" algn="ctr">
                       <a:solidFill>
                         <a:srgbClr val="E3E7EA"/>
@@ -12477,7 +12036,7 @@
                     <a:bodyPr/>
                     <a:lstStyle/>
                     <a:p>
-                      <a:pPr indent="0" marL="0">
+                      <a:pPr marL="0" indent="0">
                         <a:buNone/>
                       </a:pPr>
                       <a:r>
@@ -12491,7 +12050,7 @@
                       <a:endParaRPr lang="en-US" sz="1050" dirty="0"/>
                     </a:p>
                   </a:txBody>
-                  <a:tcPr marL="91440" marR="91440" marT="45720" marB="45720" anchor="ctr">
+                  <a:tcPr anchor="ctr">
                     <a:lnL w="9525" cap="flat" cmpd="sng" algn="ctr">
                       <a:solidFill>
                         <a:srgbClr val="E3E7EA"/>
@@ -12533,6 +12092,11 @@
                     </a:solidFill>
                   </a:tcPr>
                 </a:tc>
+                <a:extLst>
+                  <a:ext uri="{0D108BD9-81ED-4DB2-BD59-A6C34878D82A}">
+                    <a16:rowId xmlns:a16="http://schemas.microsoft.com/office/drawing/2014/main" val="10004"/>
+                  </a:ext>
+                </a:extLst>
               </a:tr>
               <a:tr h="402336">
                 <a:tc>
@@ -12540,7 +12104,7 @@
                     <a:bodyPr/>
                     <a:lstStyle/>
                     <a:p>
-                      <a:pPr indent="0" marL="0">
+                      <a:pPr marL="0" indent="0">
                         <a:buNone/>
                       </a:pPr>
                       <a:r>
@@ -12554,7 +12118,7 @@
                       <a:endParaRPr lang="en-US" sz="1050" dirty="0"/>
                     </a:p>
                   </a:txBody>
-                  <a:tcPr marL="91440" marR="91440" marT="45720" marB="45720" anchor="ctr">
+                  <a:tcPr anchor="ctr">
                     <a:lnL w="9525" cap="flat" cmpd="sng" algn="ctr">
                       <a:solidFill>
                         <a:srgbClr val="E3E7EA"/>
@@ -12601,7 +12165,7 @@
                     <a:bodyPr/>
                     <a:lstStyle/>
                     <a:p>
-                      <a:pPr indent="0" marL="0">
+                      <a:pPr marL="0" indent="0">
                         <a:buNone/>
                       </a:pPr>
                       <a:r>
@@ -12615,7 +12179,7 @@
                       <a:endParaRPr lang="en-US" sz="1050" dirty="0"/>
                     </a:p>
                   </a:txBody>
-                  <a:tcPr marL="91440" marR="91440" marT="45720" marB="45720" anchor="ctr">
+                  <a:tcPr anchor="ctr">
                     <a:lnL w="9525" cap="flat" cmpd="sng" algn="ctr">
                       <a:solidFill>
                         <a:srgbClr val="E3E7EA"/>
@@ -12662,7 +12226,7 @@
                     <a:bodyPr/>
                     <a:lstStyle/>
                     <a:p>
-                      <a:pPr indent="0" marL="0">
+                      <a:pPr marL="0" indent="0">
                         <a:buNone/>
                       </a:pPr>
                       <a:r>
@@ -12676,7 +12240,7 @@
                       <a:endParaRPr lang="en-US" sz="1050" dirty="0"/>
                     </a:p>
                   </a:txBody>
-                  <a:tcPr marL="91440" marR="91440" marT="45720" marB="45720" anchor="ctr">
+                  <a:tcPr anchor="ctr">
                     <a:lnL w="9525" cap="flat" cmpd="sng" algn="ctr">
                       <a:solidFill>
                         <a:srgbClr val="E3E7EA"/>
@@ -12718,6 +12282,11 @@
                     </a:solidFill>
                   </a:tcPr>
                 </a:tc>
+                <a:extLst>
+                  <a:ext uri="{0D108BD9-81ED-4DB2-BD59-A6C34878D82A}">
+                    <a16:rowId xmlns:a16="http://schemas.microsoft.com/office/drawing/2014/main" val="10005"/>
+                  </a:ext>
+                </a:extLst>
               </a:tr>
               <a:tr h="402336">
                 <a:tc>
@@ -12725,7 +12294,7 @@
                     <a:bodyPr/>
                     <a:lstStyle/>
                     <a:p>
-                      <a:pPr indent="0" marL="0">
+                      <a:pPr marL="0" indent="0">
                         <a:buNone/>
                       </a:pPr>
                       <a:r>
@@ -12739,7 +12308,7 @@
                       <a:endParaRPr lang="en-US" sz="1050" dirty="0"/>
                     </a:p>
                   </a:txBody>
-                  <a:tcPr marL="91440" marR="91440" marT="45720" marB="45720" anchor="ctr">
+                  <a:tcPr anchor="ctr">
                     <a:lnL w="9525" cap="flat" cmpd="sng" algn="ctr">
                       <a:solidFill>
                         <a:srgbClr val="E3E7EA"/>
@@ -12786,7 +12355,7 @@
                     <a:bodyPr/>
                     <a:lstStyle/>
                     <a:p>
-                      <a:pPr indent="0" marL="0">
+                      <a:pPr marL="0" indent="0">
                         <a:buNone/>
                       </a:pPr>
                       <a:r>
@@ -12800,7 +12369,7 @@
                       <a:endParaRPr lang="en-US" sz="1050" dirty="0"/>
                     </a:p>
                   </a:txBody>
-                  <a:tcPr marL="91440" marR="91440" marT="45720" marB="45720" anchor="ctr">
+                  <a:tcPr anchor="ctr">
                     <a:lnL w="9525" cap="flat" cmpd="sng" algn="ctr">
                       <a:solidFill>
                         <a:srgbClr val="E3E7EA"/>
@@ -12847,7 +12416,7 @@
                     <a:bodyPr/>
                     <a:lstStyle/>
                     <a:p>
-                      <a:pPr indent="0" marL="0">
+                      <a:pPr marL="0" indent="0">
                         <a:buNone/>
                       </a:pPr>
                       <a:r>
@@ -12861,7 +12430,7 @@
                       <a:endParaRPr lang="en-US" sz="1050" dirty="0"/>
                     </a:p>
                   </a:txBody>
-                  <a:tcPr marL="91440" marR="91440" marT="45720" marB="45720" anchor="ctr">
+                  <a:tcPr anchor="ctr">
                     <a:lnL w="9525" cap="flat" cmpd="sng" algn="ctr">
                       <a:solidFill>
                         <a:srgbClr val="E3E7EA"/>
@@ -12903,6 +12472,11 @@
                     </a:solidFill>
                   </a:tcPr>
                 </a:tc>
+                <a:extLst>
+                  <a:ext uri="{0D108BD9-81ED-4DB2-BD59-A6C34878D82A}">
+                    <a16:rowId xmlns:a16="http://schemas.microsoft.com/office/drawing/2014/main" val="10006"/>
+                  </a:ext>
+                </a:extLst>
               </a:tr>
               <a:tr h="402336">
                 <a:tc>
@@ -12910,7 +12484,7 @@
                     <a:bodyPr/>
                     <a:lstStyle/>
                     <a:p>
-                      <a:pPr indent="0" marL="0">
+                      <a:pPr marL="0" indent="0">
                         <a:buNone/>
                       </a:pPr>
                       <a:r>
@@ -12924,7 +12498,7 @@
                       <a:endParaRPr lang="en-US" sz="1050" dirty="0"/>
                     </a:p>
                   </a:txBody>
-                  <a:tcPr marL="91440" marR="91440" marT="45720" marB="45720" anchor="ctr">
+                  <a:tcPr anchor="ctr">
                     <a:lnL w="9525" cap="flat" cmpd="sng" algn="ctr">
                       <a:solidFill>
                         <a:srgbClr val="E3E7EA"/>
@@ -12971,7 +12545,7 @@
                     <a:bodyPr/>
                     <a:lstStyle/>
                     <a:p>
-                      <a:pPr indent="0" marL="0">
+                      <a:pPr marL="0" indent="0">
                         <a:buNone/>
                       </a:pPr>
                       <a:r>
@@ -12985,7 +12559,7 @@
                       <a:endParaRPr lang="en-US" sz="1050" dirty="0"/>
                     </a:p>
                   </a:txBody>
-                  <a:tcPr marL="91440" marR="91440" marT="45720" marB="45720" anchor="ctr">
+                  <a:tcPr anchor="ctr">
                     <a:lnL w="9525" cap="flat" cmpd="sng" algn="ctr">
                       <a:solidFill>
                         <a:srgbClr val="E3E7EA"/>
@@ -13032,7 +12606,7 @@
                     <a:bodyPr/>
                     <a:lstStyle/>
                     <a:p>
-                      <a:pPr indent="0" marL="0">
+                      <a:pPr marL="0" indent="0">
                         <a:buNone/>
                       </a:pPr>
                       <a:r>
@@ -13046,7 +12620,7 @@
                       <a:endParaRPr lang="en-US" sz="1050" dirty="0"/>
                     </a:p>
                   </a:txBody>
-                  <a:tcPr marL="91440" marR="91440" marT="45720" marB="45720" anchor="ctr">
+                  <a:tcPr anchor="ctr">
                     <a:lnL w="9525" cap="flat" cmpd="sng" algn="ctr">
                       <a:solidFill>
                         <a:srgbClr val="E3E7EA"/>
@@ -13088,6 +12662,11 @@
                     </a:solidFill>
                   </a:tcPr>
                 </a:tc>
+                <a:extLst>
+                  <a:ext uri="{0D108BD9-81ED-4DB2-BD59-A6C34878D82A}">
+                    <a16:rowId xmlns:a16="http://schemas.microsoft.com/office/drawing/2014/main" val="10007"/>
+                  </a:ext>
+                </a:extLst>
               </a:tr>
               <a:tr h="402336">
                 <a:tc>
@@ -13095,7 +12674,7 @@
                     <a:bodyPr/>
                     <a:lstStyle/>
                     <a:p>
-                      <a:pPr indent="0" marL="0">
+                      <a:pPr marL="0" indent="0">
                         <a:buNone/>
                       </a:pPr>
                       <a:r>
@@ -13109,7 +12688,7 @@
                       <a:endParaRPr lang="en-US" sz="1050" dirty="0"/>
                     </a:p>
                   </a:txBody>
-                  <a:tcPr marL="91440" marR="91440" marT="45720" marB="45720" anchor="ctr">
+                  <a:tcPr anchor="ctr">
                     <a:lnL w="9525" cap="flat" cmpd="sng" algn="ctr">
                       <a:solidFill>
                         <a:srgbClr val="E3E7EA"/>
@@ -13156,7 +12735,7 @@
                     <a:bodyPr/>
                     <a:lstStyle/>
                     <a:p>
-                      <a:pPr indent="0" marL="0">
+                      <a:pPr marL="0" indent="0">
                         <a:buNone/>
                       </a:pPr>
                       <a:r>
@@ -13170,7 +12749,7 @@
                       <a:endParaRPr lang="en-US" sz="1050" dirty="0"/>
                     </a:p>
                   </a:txBody>
-                  <a:tcPr marL="91440" marR="91440" marT="45720" marB="45720" anchor="ctr">
+                  <a:tcPr anchor="ctr">
                     <a:lnL w="9525" cap="flat" cmpd="sng" algn="ctr">
                       <a:solidFill>
                         <a:srgbClr val="E3E7EA"/>
@@ -13217,7 +12796,7 @@
                     <a:bodyPr/>
                     <a:lstStyle/>
                     <a:p>
-                      <a:pPr indent="0" marL="0">
+                      <a:pPr marL="0" indent="0">
                         <a:buNone/>
                       </a:pPr>
                       <a:r>
@@ -13231,7 +12810,7 @@
                       <a:endParaRPr lang="en-US" sz="1050" dirty="0"/>
                     </a:p>
                   </a:txBody>
-                  <a:tcPr marL="91440" marR="91440" marT="45720" marB="45720" anchor="ctr">
+                  <a:tcPr anchor="ctr">
                     <a:lnL w="9525" cap="flat" cmpd="sng" algn="ctr">
                       <a:solidFill>
                         <a:srgbClr val="E3E7EA"/>
@@ -13273,6 +12852,11 @@
                     </a:solidFill>
                   </a:tcPr>
                 </a:tc>
+                <a:extLst>
+                  <a:ext uri="{0D108BD9-81ED-4DB2-BD59-A6C34878D82A}">
+                    <a16:rowId xmlns:a16="http://schemas.microsoft.com/office/drawing/2014/main" val="10008"/>
+                  </a:ext>
+                </a:extLst>
               </a:tr>
               <a:tr h="402336">
                 <a:tc>
@@ -13280,7 +12864,7 @@
                     <a:bodyPr/>
                     <a:lstStyle/>
                     <a:p>
-                      <a:pPr indent="0" marL="0">
+                      <a:pPr marL="0" indent="0">
                         <a:buNone/>
                       </a:pPr>
                       <a:r>
@@ -13294,7 +12878,7 @@
                       <a:endParaRPr lang="en-US" sz="1050" dirty="0"/>
                     </a:p>
                   </a:txBody>
-                  <a:tcPr marL="91440" marR="91440" marT="45720" marB="45720" anchor="ctr">
+                  <a:tcPr anchor="ctr">
                     <a:lnL w="9525" cap="flat" cmpd="sng" algn="ctr">
                       <a:solidFill>
                         <a:srgbClr val="E3E7EA"/>
@@ -13341,7 +12925,7 @@
                     <a:bodyPr/>
                     <a:lstStyle/>
                     <a:p>
-                      <a:pPr indent="0" marL="0">
+                      <a:pPr marL="0" indent="0">
                         <a:buNone/>
                       </a:pPr>
                       <a:r>
@@ -13355,7 +12939,7 @@
                       <a:endParaRPr lang="en-US" sz="1050" dirty="0"/>
                     </a:p>
                   </a:txBody>
-                  <a:tcPr marL="91440" marR="91440" marT="45720" marB="45720" anchor="ctr">
+                  <a:tcPr anchor="ctr">
                     <a:lnL w="9525" cap="flat" cmpd="sng" algn="ctr">
                       <a:solidFill>
                         <a:srgbClr val="E3E7EA"/>
@@ -13402,7 +12986,7 @@
                     <a:bodyPr/>
                     <a:lstStyle/>
                     <a:p>
-                      <a:pPr indent="0" marL="0">
+                      <a:pPr marL="0" indent="0">
                         <a:buNone/>
                       </a:pPr>
                       <a:r>
@@ -13416,7 +13000,7 @@
                       <a:endParaRPr lang="en-US" sz="1050" dirty="0"/>
                     </a:p>
                   </a:txBody>
-                  <a:tcPr marL="91440" marR="91440" marT="45720" marB="45720" anchor="ctr">
+                  <a:tcPr anchor="ctr">
                     <a:lnL w="9525" cap="flat" cmpd="sng" algn="ctr">
                       <a:solidFill>
                         <a:srgbClr val="E3E7EA"/>
@@ -13458,6 +13042,11 @@
                     </a:solidFill>
                   </a:tcPr>
                 </a:tc>
+                <a:extLst>
+                  <a:ext uri="{0D108BD9-81ED-4DB2-BD59-A6C34878D82A}">
+                    <a16:rowId xmlns:a16="http://schemas.microsoft.com/office/drawing/2014/main" val="10009"/>
+                  </a:ext>
+                </a:extLst>
               </a:tr>
               <a:tr h="402336">
                 <a:tc>
@@ -13465,7 +13054,7 @@
                     <a:bodyPr/>
                     <a:lstStyle/>
                     <a:p>
-                      <a:pPr indent="0" marL="0">
+                      <a:pPr marL="0" indent="0">
                         <a:buNone/>
                       </a:pPr>
                       <a:r>
@@ -13479,7 +13068,7 @@
                       <a:endParaRPr lang="en-US" sz="1050" dirty="0"/>
                     </a:p>
                   </a:txBody>
-                  <a:tcPr marL="91440" marR="91440" marT="45720" marB="45720" anchor="ctr">
+                  <a:tcPr anchor="ctr">
                     <a:lnL w="9525" cap="flat" cmpd="sng" algn="ctr">
                       <a:solidFill>
                         <a:srgbClr val="E3E7EA"/>
@@ -13526,7 +13115,7 @@
                     <a:bodyPr/>
                     <a:lstStyle/>
                     <a:p>
-                      <a:pPr indent="0" marL="0">
+                      <a:pPr marL="0" indent="0">
                         <a:buNone/>
                       </a:pPr>
                       <a:r>
@@ -13540,7 +13129,7 @@
                       <a:endParaRPr lang="en-US" sz="1050" dirty="0"/>
                     </a:p>
                   </a:txBody>
-                  <a:tcPr marL="91440" marR="91440" marT="45720" marB="45720" anchor="ctr">
+                  <a:tcPr anchor="ctr">
                     <a:lnL w="9525" cap="flat" cmpd="sng" algn="ctr">
                       <a:solidFill>
                         <a:srgbClr val="E3E7EA"/>
@@ -13587,7 +13176,7 @@
                     <a:bodyPr/>
                     <a:lstStyle/>
                     <a:p>
-                      <a:pPr indent="0" marL="0">
+                      <a:pPr marL="0" indent="0">
                         <a:buNone/>
                       </a:pPr>
                       <a:r>
@@ -13601,7 +13190,7 @@
                       <a:endParaRPr lang="en-US" sz="1050" dirty="0"/>
                     </a:p>
                   </a:txBody>
-                  <a:tcPr marL="91440" marR="91440" marT="45720" marB="45720" anchor="ctr">
+                  <a:tcPr anchor="ctr">
                     <a:lnL w="9525" cap="flat" cmpd="sng" algn="ctr">
                       <a:solidFill>
                         <a:srgbClr val="E3E7EA"/>
@@ -13643,6 +13232,11 @@
                     </a:solidFill>
                   </a:tcPr>
                 </a:tc>
+                <a:extLst>
+                  <a:ext uri="{0D108BD9-81ED-4DB2-BD59-A6C34878D82A}">
+                    <a16:rowId xmlns:a16="http://schemas.microsoft.com/office/drawing/2014/main" val="10010"/>
+                  </a:ext>
+                </a:extLst>
               </a:tr>
               <a:tr h="402336">
                 <a:tc>
@@ -13650,7 +13244,7 @@
                     <a:bodyPr/>
                     <a:lstStyle/>
                     <a:p>
-                      <a:pPr indent="0" marL="0">
+                      <a:pPr marL="0" indent="0">
                         <a:buNone/>
                       </a:pPr>
                       <a:r>
@@ -13664,7 +13258,7 @@
                       <a:endParaRPr lang="en-US" sz="1050" dirty="0"/>
                     </a:p>
                   </a:txBody>
-                  <a:tcPr marL="91440" marR="91440" marT="45720" marB="45720" anchor="ctr">
+                  <a:tcPr anchor="ctr">
                     <a:lnL w="9525" cap="flat" cmpd="sng" algn="ctr">
                       <a:solidFill>
                         <a:srgbClr val="E3E7EA"/>
@@ -13711,7 +13305,7 @@
                     <a:bodyPr/>
                     <a:lstStyle/>
                     <a:p>
-                      <a:pPr indent="0" marL="0">
+                      <a:pPr marL="0" indent="0">
                         <a:buNone/>
                       </a:pPr>
                       <a:r>
@@ -13725,7 +13319,7 @@
                       <a:endParaRPr lang="en-US" sz="1050" dirty="0"/>
                     </a:p>
                   </a:txBody>
-                  <a:tcPr marL="91440" marR="91440" marT="45720" marB="45720" anchor="ctr">
+                  <a:tcPr anchor="ctr">
                     <a:lnL w="9525" cap="flat" cmpd="sng" algn="ctr">
                       <a:solidFill>
                         <a:srgbClr val="E3E7EA"/>
@@ -13772,7 +13366,7 @@
                     <a:bodyPr/>
                     <a:lstStyle/>
                     <a:p>
-                      <a:pPr indent="0" marL="0">
+                      <a:pPr marL="0" indent="0">
                         <a:buNone/>
                       </a:pPr>
                       <a:r>
@@ -13786,7 +13380,7 @@
                       <a:endParaRPr lang="en-US" sz="1050" dirty="0"/>
                     </a:p>
                   </a:txBody>
-                  <a:tcPr marL="91440" marR="91440" marT="45720" marB="45720" anchor="ctr">
+                  <a:tcPr anchor="ctr">
                     <a:lnL w="9525" cap="flat" cmpd="sng" algn="ctr">
                       <a:solidFill>
                         <a:srgbClr val="E3E7EA"/>
@@ -13828,6 +13422,11 @@
                     </a:solidFill>
                   </a:tcPr>
                 </a:tc>
+                <a:extLst>
+                  <a:ext uri="{0D108BD9-81ED-4DB2-BD59-A6C34878D82A}">
+                    <a16:rowId xmlns:a16="http://schemas.microsoft.com/office/drawing/2014/main" val="10011"/>
+                  </a:ext>
+                </a:extLst>
               </a:tr>
               <a:tr h="402336">
                 <a:tc>
@@ -13835,7 +13434,7 @@
                     <a:bodyPr/>
                     <a:lstStyle/>
                     <a:p>
-                      <a:pPr indent="0" marL="0">
+                      <a:pPr marL="0" indent="0">
                         <a:buNone/>
                       </a:pPr>
                       <a:r>
@@ -13849,7 +13448,7 @@
                       <a:endParaRPr lang="en-US" sz="1050" dirty="0"/>
                     </a:p>
                   </a:txBody>
-                  <a:tcPr marL="91440" marR="91440" marT="45720" marB="45720" anchor="ctr">
+                  <a:tcPr anchor="ctr">
                     <a:lnL w="9525" cap="flat" cmpd="sng" algn="ctr">
                       <a:solidFill>
                         <a:srgbClr val="E3E7EA"/>
@@ -13896,7 +13495,7 @@
                     <a:bodyPr/>
                     <a:lstStyle/>
                     <a:p>
-                      <a:pPr indent="0" marL="0">
+                      <a:pPr marL="0" indent="0">
                         <a:buNone/>
                       </a:pPr>
                       <a:r>
@@ -13910,7 +13509,7 @@
                       <a:endParaRPr lang="en-US" sz="1050" dirty="0"/>
                     </a:p>
                   </a:txBody>
-                  <a:tcPr marL="91440" marR="91440" marT="45720" marB="45720" anchor="ctr">
+                  <a:tcPr anchor="ctr">
                     <a:lnL w="9525" cap="flat" cmpd="sng" algn="ctr">
                       <a:solidFill>
                         <a:srgbClr val="E3E7EA"/>
@@ -13957,7 +13556,7 @@
                     <a:bodyPr/>
                     <a:lstStyle/>
                     <a:p>
-                      <a:pPr indent="0" marL="0">
+                      <a:pPr marL="0" indent="0">
                         <a:buNone/>
                       </a:pPr>
                       <a:r>
@@ -13971,7 +13570,7 @@
                       <a:endParaRPr lang="en-US" sz="1050" dirty="0"/>
                     </a:p>
                   </a:txBody>
-                  <a:tcPr marL="91440" marR="91440" marT="45720" marB="45720" anchor="ctr">
+                  <a:tcPr anchor="ctr">
                     <a:lnL w="9525" cap="flat" cmpd="sng" algn="ctr">
                       <a:solidFill>
                         <a:srgbClr val="E3E7EA"/>
@@ -14013,6 +13612,11 @@
                     </a:solidFill>
                   </a:tcPr>
                 </a:tc>
+                <a:extLst>
+                  <a:ext uri="{0D108BD9-81ED-4DB2-BD59-A6C34878D82A}">
+                    <a16:rowId xmlns:a16="http://schemas.microsoft.com/office/drawing/2014/main" val="10012"/>
+                  </a:ext>
+                </a:extLst>
               </a:tr>
             </a:tbl>
           </a:graphicData>
@@ -14039,7 +13643,7 @@
           <a:bodyPr wrap="square" rtlCol="0" anchor="ctr"/>
           <a:lstStyle/>
           <a:p>
-            <a:pPr indent="0" marL="0">
+            <a:pPr marL="0" indent="0">
               <a:buNone/>
             </a:pPr>
             <a:r>
@@ -14078,7 +13682,7 @@
           <a:bodyPr wrap="square" rtlCol="0" anchor="ctr"/>
           <a:lstStyle/>
           <a:p>
-            <a:pPr algn="r" indent="0" marL="0">
+            <a:pPr marL="0" indent="0" algn="r">
               <a:buNone/>
             </a:pPr>
             <a:r>
@@ -14182,11 +13786,11 @@
           <a:bodyPr wrap="square" rtlCol="0" anchor="ctr"/>
           <a:lstStyle/>
           <a:p>
-            <a:pPr indent="0" marL="0">
-              <a:buNone/>
-            </a:pPr>
-            <a:r>
-              <a:rPr lang="en-US" sz="1200" b="1" spc="100" kern="0" dirty="0">
+            <a:pPr marL="0" indent="0">
+              <a:buNone/>
+            </a:pPr>
+            <a:r>
+              <a:rPr lang="en-US" sz="1200" b="1" kern="0" spc="100" dirty="0">
                 <a:solidFill>
                   <a:srgbClr val="FF9900"/>
                 </a:solidFill>
@@ -14221,7 +13825,7 @@
           <a:bodyPr wrap="square" rtlCol="0" anchor="ctr"/>
           <a:lstStyle/>
           <a:p>
-            <a:pPr indent="0" marL="0">
+            <a:pPr marL="0" indent="0">
               <a:buNone/>
             </a:pPr>
             <a:r>
@@ -14302,7 +13906,7 @@
           <a:bodyPr wrap="square" rtlCol="0" anchor="ctr"/>
           <a:lstStyle/>
           <a:p>
-            <a:pPr algn="ctr" indent="0" marL="0">
+            <a:pPr marL="0" indent="0" algn="ctr">
               <a:buNone/>
             </a:pPr>
             <a:r>
@@ -14341,7 +13945,7 @@
           <a:bodyPr wrap="square" rtlCol="0" anchor="ctr"/>
           <a:lstStyle/>
           <a:p>
-            <a:pPr algn="ctr" indent="0" marL="0">
+            <a:pPr marL="0" indent="0" algn="ctr">
               <a:buNone/>
             </a:pPr>
             <a:r>
@@ -14380,7 +13984,7 @@
           <a:bodyPr wrap="square" rtlCol="0" anchor="t"/>
           <a:lstStyle/>
           <a:p>
-            <a:pPr algn="ctr" indent="0" marL="0">
+            <a:pPr marL="0" indent="0" algn="ctr">
               <a:lnSpc>
                 <a:spcPct val="115000"/>
               </a:lnSpc>
@@ -14464,7 +14068,7 @@
           <a:bodyPr wrap="square" rtlCol="0" anchor="ctr"/>
           <a:lstStyle/>
           <a:p>
-            <a:pPr algn="ctr" indent="0" marL="0">
+            <a:pPr marL="0" indent="0" algn="ctr">
               <a:buNone/>
             </a:pPr>
             <a:r>
@@ -14503,7 +14107,7 @@
           <a:bodyPr wrap="square" rtlCol="0" anchor="ctr"/>
           <a:lstStyle/>
           <a:p>
-            <a:pPr algn="ctr" indent="0" marL="0">
+            <a:pPr marL="0" indent="0" algn="ctr">
               <a:buNone/>
             </a:pPr>
             <a:r>
@@ -14542,7 +14146,7 @@
           <a:bodyPr wrap="square" rtlCol="0" anchor="t"/>
           <a:lstStyle/>
           <a:p>
-            <a:pPr algn="ctr" indent="0" marL="0">
+            <a:pPr marL="0" indent="0" algn="ctr">
               <a:lnSpc>
                 <a:spcPct val="115000"/>
               </a:lnSpc>
@@ -14626,7 +14230,7 @@
           <a:bodyPr wrap="square" rtlCol="0" anchor="ctr"/>
           <a:lstStyle/>
           <a:p>
-            <a:pPr algn="ctr" indent="0" marL="0">
+            <a:pPr marL="0" indent="0" algn="ctr">
               <a:buNone/>
             </a:pPr>
             <a:r>
@@ -14665,7 +14269,7 @@
           <a:bodyPr wrap="square" rtlCol="0" anchor="ctr"/>
           <a:lstStyle/>
           <a:p>
-            <a:pPr algn="ctr" indent="0" marL="0">
+            <a:pPr marL="0" indent="0" algn="ctr">
               <a:buNone/>
             </a:pPr>
             <a:r>
@@ -14704,7 +14308,7 @@
           <a:bodyPr wrap="square" rtlCol="0" anchor="t"/>
           <a:lstStyle/>
           <a:p>
-            <a:pPr algn="ctr" indent="0" marL="0">
+            <a:pPr marL="0" indent="0" algn="ctr">
               <a:lnSpc>
                 <a:spcPct val="115000"/>
               </a:lnSpc>
@@ -14788,7 +14392,7 @@
           <a:bodyPr wrap="square" rtlCol="0" anchor="ctr"/>
           <a:lstStyle/>
           <a:p>
-            <a:pPr algn="ctr" indent="0" marL="0">
+            <a:pPr marL="0" indent="0" algn="ctr">
               <a:buNone/>
             </a:pPr>
             <a:r>
@@ -14827,7 +14431,7 @@
           <a:bodyPr wrap="square" rtlCol="0" anchor="ctr"/>
           <a:lstStyle/>
           <a:p>
-            <a:pPr algn="ctr" indent="0" marL="0">
+            <a:pPr marL="0" indent="0" algn="ctr">
               <a:buNone/>
             </a:pPr>
             <a:r>
@@ -14866,7 +14470,7 @@
           <a:bodyPr wrap="square" rtlCol="0" anchor="t"/>
           <a:lstStyle/>
           <a:p>
-            <a:pPr algn="ctr" indent="0" marL="0">
+            <a:pPr marL="0" indent="0" algn="ctr">
               <a:lnSpc>
                 <a:spcPct val="115000"/>
               </a:lnSpc>
@@ -14950,7 +14554,7 @@
           <a:bodyPr wrap="square" rtlCol="0" anchor="ctr"/>
           <a:lstStyle/>
           <a:p>
-            <a:pPr algn="ctr" indent="0" marL="0">
+            <a:pPr marL="0" indent="0" algn="ctr">
               <a:buNone/>
             </a:pPr>
             <a:r>
@@ -14989,7 +14593,7 @@
           <a:bodyPr wrap="square" rtlCol="0" anchor="ctr"/>
           <a:lstStyle/>
           <a:p>
-            <a:pPr algn="ctr" indent="0" marL="0">
+            <a:pPr marL="0" indent="0" algn="ctr">
               <a:buNone/>
             </a:pPr>
             <a:r>
@@ -15028,7 +14632,7 @@
           <a:bodyPr wrap="square" rtlCol="0" anchor="t"/>
           <a:lstStyle/>
           <a:p>
-            <a:pPr algn="ctr" indent="0" marL="0">
+            <a:pPr marL="0" indent="0" algn="ctr">
               <a:lnSpc>
                 <a:spcPct val="115000"/>
               </a:lnSpc>
@@ -15070,7 +14674,7 @@
           <a:bodyPr wrap="square" rtlCol="0" anchor="ctr"/>
           <a:lstStyle/>
           <a:p>
-            <a:pPr indent="0" marL="0">
+            <a:pPr marL="0" indent="0">
               <a:buNone/>
             </a:pPr>
             <a:r>
@@ -15109,7 +14713,7 @@
           <a:bodyPr wrap="square" rtlCol="0" anchor="ctr"/>
           <a:lstStyle/>
           <a:p>
-            <a:pPr algn="r" indent="0" marL="0">
+            <a:pPr marL="0" indent="0" algn="r">
               <a:buNone/>
             </a:pPr>
             <a:r>
@@ -15213,11 +14817,11 @@
           <a:bodyPr wrap="square" rtlCol="0" anchor="ctr"/>
           <a:lstStyle/>
           <a:p>
-            <a:pPr indent="0" marL="0">
-              <a:buNone/>
-            </a:pPr>
-            <a:r>
-              <a:rPr lang="en-US" sz="1200" b="1" spc="100" kern="0" dirty="0">
+            <a:pPr marL="0" indent="0">
+              <a:buNone/>
+            </a:pPr>
+            <a:r>
+              <a:rPr lang="en-US" sz="1200" b="1" kern="0" spc="100" dirty="0">
                 <a:solidFill>
                   <a:srgbClr val="FF9900"/>
                 </a:solidFill>
@@ -15252,7 +14856,7 @@
           <a:bodyPr wrap="square" rtlCol="0" anchor="ctr"/>
           <a:lstStyle/>
           <a:p>
-            <a:pPr indent="0" marL="0">
+            <a:pPr marL="0" indent="0">
               <a:buNone/>
             </a:pPr>
             <a:r>
@@ -15311,7 +14915,7 @@
           <a:bodyPr wrap="square" rtlCol="0" anchor="ctr"/>
           <a:lstStyle/>
           <a:p>
-            <a:pPr indent="0" marL="0">
+            <a:pPr marL="0" indent="0">
               <a:buNone/>
             </a:pPr>
             <a:r>
@@ -15350,7 +14954,7 @@
           <a:bodyPr wrap="square" rtlCol="0" anchor="t"/>
           <a:lstStyle/>
           <a:p>
-            <a:pPr indent="0" marL="0">
+            <a:pPr marL="0" indent="0">
               <a:lnSpc>
                 <a:spcPct val="110000"/>
               </a:lnSpc>
@@ -15412,7 +15016,7 @@
           <a:bodyPr wrap="square" rtlCol="0" anchor="ctr"/>
           <a:lstStyle/>
           <a:p>
-            <a:pPr indent="0" marL="0">
+            <a:pPr marL="0" indent="0">
               <a:buNone/>
             </a:pPr>
             <a:r>
@@ -15451,7 +15055,7 @@
           <a:bodyPr wrap="square" rtlCol="0" anchor="t"/>
           <a:lstStyle/>
           <a:p>
-            <a:pPr indent="0" marL="0">
+            <a:pPr marL="0" indent="0">
               <a:lnSpc>
                 <a:spcPct val="110000"/>
               </a:lnSpc>
@@ -15513,7 +15117,7 @@
           <a:bodyPr wrap="square" rtlCol="0" anchor="ctr"/>
           <a:lstStyle/>
           <a:p>
-            <a:pPr indent="0" marL="0">
+            <a:pPr marL="0" indent="0">
               <a:buNone/>
             </a:pPr>
             <a:r>
@@ -15552,7 +15156,7 @@
           <a:bodyPr wrap="square" rtlCol="0" anchor="t"/>
           <a:lstStyle/>
           <a:p>
-            <a:pPr indent="0" marL="0">
+            <a:pPr marL="0" indent="0">
               <a:lnSpc>
                 <a:spcPct val="110000"/>
               </a:lnSpc>
@@ -15614,7 +15218,7 @@
           <a:bodyPr wrap="square" rtlCol="0" anchor="ctr"/>
           <a:lstStyle/>
           <a:p>
-            <a:pPr indent="0" marL="0">
+            <a:pPr marL="0" indent="0">
               <a:buNone/>
             </a:pPr>
             <a:r>
@@ -15653,7 +15257,7 @@
           <a:bodyPr wrap="square" rtlCol="0" anchor="t"/>
           <a:lstStyle/>
           <a:p>
-            <a:pPr indent="0" marL="0">
+            <a:pPr marL="0" indent="0">
               <a:lnSpc>
                 <a:spcPct val="110000"/>
               </a:lnSpc>
@@ -15715,7 +15319,7 @@
           <a:bodyPr wrap="square" rtlCol="0" anchor="ctr"/>
           <a:lstStyle/>
           <a:p>
-            <a:pPr indent="0" marL="0">
+            <a:pPr marL="0" indent="0">
               <a:buNone/>
             </a:pPr>
             <a:r>
@@ -15754,7 +15358,7 @@
           <a:bodyPr wrap="square" rtlCol="0" anchor="t"/>
           <a:lstStyle/>
           <a:p>
-            <a:pPr indent="0" marL="0">
+            <a:pPr marL="0" indent="0">
               <a:lnSpc>
                 <a:spcPct val="110000"/>
               </a:lnSpc>
@@ -15816,7 +15420,7 @@
           <a:bodyPr wrap="square" rtlCol="0" anchor="ctr"/>
           <a:lstStyle/>
           <a:p>
-            <a:pPr indent="0" marL="0">
+            <a:pPr marL="0" indent="0">
               <a:buNone/>
             </a:pPr>
             <a:r>
@@ -15855,7 +15459,7 @@
           <a:bodyPr wrap="square" rtlCol="0" anchor="t"/>
           <a:lstStyle/>
           <a:p>
-            <a:pPr indent="0" marL="0">
+            <a:pPr marL="0" indent="0">
               <a:lnSpc>
                 <a:spcPct val="110000"/>
               </a:lnSpc>
@@ -15897,7 +15501,7 @@
           <a:bodyPr wrap="square" rtlCol="0" anchor="ctr"/>
           <a:lstStyle/>
           <a:p>
-            <a:pPr indent="0" marL="0">
+            <a:pPr marL="0" indent="0">
               <a:buNone/>
             </a:pPr>
             <a:r>
@@ -15936,7 +15540,7 @@
           <a:bodyPr wrap="square" rtlCol="0" anchor="ctr"/>
           <a:lstStyle/>
           <a:p>
-            <a:pPr algn="r" indent="0" marL="0">
+            <a:pPr marL="0" indent="0" algn="r">
               <a:buNone/>
             </a:pPr>
             <a:r>
@@ -16040,11 +15644,11 @@
           <a:bodyPr wrap="square" rtlCol="0" anchor="ctr"/>
           <a:lstStyle/>
           <a:p>
-            <a:pPr indent="0" marL="0">
-              <a:buNone/>
-            </a:pPr>
-            <a:r>
-              <a:rPr lang="en-US" sz="1200" b="1" spc="100" kern="0" dirty="0">
+            <a:pPr marL="0" indent="0">
+              <a:buNone/>
+            </a:pPr>
+            <a:r>
+              <a:rPr lang="en-US" sz="1200" b="1" kern="0" spc="100" dirty="0">
                 <a:solidFill>
                   <a:srgbClr val="FF9900"/>
                 </a:solidFill>
@@ -16079,7 +15683,7 @@
           <a:bodyPr wrap="square" rtlCol="0" anchor="ctr"/>
           <a:lstStyle/>
           <a:p>
-            <a:pPr indent="0" marL="0">
+            <a:pPr marL="0" indent="0">
               <a:buNone/>
             </a:pPr>
             <a:r>
@@ -16140,7 +15744,7 @@
           <a:bodyPr wrap="square" rtlCol="0" anchor="ctr"/>
           <a:lstStyle/>
           <a:p>
-            <a:pPr indent="0" marL="0">
+            <a:pPr marL="0" indent="0">
               <a:buNone/>
             </a:pPr>
             <a:r>
@@ -16179,7 +15783,7 @@
           <a:bodyPr wrap="square" rtlCol="0" anchor="t"/>
           <a:lstStyle/>
           <a:p>
-            <a:pPr indent="0" marL="0">
+            <a:pPr marL="0" indent="0">
               <a:buNone/>
             </a:pPr>
             <a:r>
@@ -16218,7 +15822,7 @@
           <a:bodyPr wrap="square" rtlCol="0" anchor="ctr"/>
           <a:lstStyle/>
           <a:p>
-            <a:pPr algn="ctr" indent="0" marL="0">
+            <a:pPr marL="0" indent="0" algn="ctr">
               <a:buNone/>
             </a:pPr>
             <a:r>
@@ -16279,7 +15883,7 @@
           <a:bodyPr wrap="square" rtlCol="0" anchor="ctr"/>
           <a:lstStyle/>
           <a:p>
-            <a:pPr indent="0" marL="0">
+            <a:pPr marL="0" indent="0">
               <a:buNone/>
             </a:pPr>
             <a:r>
@@ -16318,7 +15922,7 @@
           <a:bodyPr wrap="square" rtlCol="0" anchor="t"/>
           <a:lstStyle/>
           <a:p>
-            <a:pPr indent="0" marL="0">
+            <a:pPr marL="0" indent="0">
               <a:buNone/>
             </a:pPr>
             <a:r>
@@ -16357,7 +15961,7 @@
           <a:bodyPr wrap="square" rtlCol="0" anchor="ctr"/>
           <a:lstStyle/>
           <a:p>
-            <a:pPr algn="ctr" indent="0" marL="0">
+            <a:pPr marL="0" indent="0" algn="ctr">
               <a:buNone/>
             </a:pPr>
             <a:r>
@@ -16418,7 +16022,7 @@
           <a:bodyPr wrap="square" rtlCol="0" anchor="ctr"/>
           <a:lstStyle/>
           <a:p>
-            <a:pPr indent="0" marL="0">
+            <a:pPr marL="0" indent="0">
               <a:buNone/>
             </a:pPr>
             <a:r>
@@ -16457,7 +16061,7 @@
           <a:bodyPr wrap="square" rtlCol="0" anchor="t"/>
           <a:lstStyle/>
           <a:p>
-            <a:pPr indent="0" marL="0">
+            <a:pPr marL="0" indent="0">
               <a:buNone/>
             </a:pPr>
             <a:r>
@@ -16496,7 +16100,7 @@
           <a:bodyPr wrap="square" rtlCol="0" anchor="ctr"/>
           <a:lstStyle/>
           <a:p>
-            <a:pPr algn="ctr" indent="0" marL="0">
+            <a:pPr marL="0" indent="0" algn="ctr">
               <a:buNone/>
             </a:pPr>
             <a:r>
@@ -16557,7 +16161,7 @@
           <a:bodyPr wrap="square" rtlCol="0" anchor="ctr"/>
           <a:lstStyle/>
           <a:p>
-            <a:pPr indent="0" marL="0">
+            <a:pPr marL="0" indent="0">
               <a:buNone/>
             </a:pPr>
             <a:r>
@@ -16596,7 +16200,7 @@
           <a:bodyPr wrap="square" rtlCol="0" anchor="t"/>
           <a:lstStyle/>
           <a:p>
-            <a:pPr indent="0" marL="0">
+            <a:pPr marL="0" indent="0">
               <a:buNone/>
             </a:pPr>
             <a:r>
@@ -16657,7 +16261,7 @@
           <a:bodyPr wrap="square" rtlCol="0" anchor="ctr"/>
           <a:lstStyle/>
           <a:p>
-            <a:pPr indent="0" marL="0">
+            <a:pPr marL="0" indent="0">
               <a:buNone/>
             </a:pPr>
             <a:r>
@@ -16696,7 +16300,7 @@
           <a:bodyPr wrap="square" rtlCol="0" anchor="t"/>
           <a:lstStyle/>
           <a:p>
-            <a:pPr indent="0" marL="0">
+            <a:pPr marL="0" indent="0">
               <a:lnSpc>
                 <a:spcPct val="115000"/>
               </a:lnSpc>
@@ -16713,12 +16317,6 @@
               </a:rPr>
               <a:t>MarkFailedStep</a:t>
             </a:r>
-            <a:pPr indent="0" marL="0">
-              <a:lnSpc>
-                <a:spcPct val="115000"/>
-              </a:lnSpc>
-              <a:buNone/>
-            </a:pPr>
             <a:r>
               <a:rPr lang="en-US" sz="1050" dirty="0">
                 <a:solidFill>
@@ -16731,12 +16329,6 @@
               <a:t> — direct DynamoDB UpdateItem sets status=failed (no Lambda).
 </a:t>
             </a:r>
-            <a:pPr indent="0" marL="0">
-              <a:lnSpc>
-                <a:spcPct val="115000"/>
-              </a:lnSpc>
-              <a:buNone/>
-            </a:pPr>
             <a:r>
               <a:rPr lang="en-US" sz="1050" b="1" dirty="0">
                 <a:solidFill>
@@ -16748,12 +16340,6 @@
               </a:rPr>
               <a:t>NotifyErrorStep</a:t>
             </a:r>
-            <a:pPr indent="0" marL="0">
-              <a:lnSpc>
-                <a:spcPct val="115000"/>
-              </a:lnSpc>
-              <a:buNone/>
-            </a:pPr>
             <a:r>
               <a:rPr lang="en-US" sz="1050" dirty="0">
                 <a:solidFill>
@@ -16790,7 +16376,7 @@
           <a:bodyPr wrap="square" rtlCol="0" anchor="ctr"/>
           <a:lstStyle/>
           <a:p>
-            <a:pPr indent="0" marL="0">
+            <a:pPr marL="0" indent="0">
               <a:buNone/>
             </a:pPr>
             <a:r>
@@ -16829,7 +16415,7 @@
           <a:bodyPr wrap="square" rtlCol="0" anchor="ctr"/>
           <a:lstStyle/>
           <a:p>
-            <a:pPr indent="0" marL="0">
+            <a:pPr marL="0" indent="0">
               <a:buNone/>
             </a:pPr>
             <a:r>
@@ -16868,7 +16454,7 @@
           <a:bodyPr wrap="square" rtlCol="0" anchor="ctr"/>
           <a:lstStyle/>
           <a:p>
-            <a:pPr algn="r" indent="0" marL="0">
+            <a:pPr marL="0" indent="0" algn="r">
               <a:buNone/>
             </a:pPr>
             <a:r>
@@ -16972,11 +16558,11 @@
           <a:bodyPr wrap="square" rtlCol="0" anchor="ctr"/>
           <a:lstStyle/>
           <a:p>
-            <a:pPr indent="0" marL="0">
-              <a:buNone/>
-            </a:pPr>
-            <a:r>
-              <a:rPr lang="en-US" sz="1200" b="1" spc="100" kern="0" dirty="0">
+            <a:pPr marL="0" indent="0">
+              <a:buNone/>
+            </a:pPr>
+            <a:r>
+              <a:rPr lang="en-US" sz="1200" b="1" kern="0" spc="100" dirty="0">
                 <a:solidFill>
                   <a:srgbClr val="FF9900"/>
                 </a:solidFill>
@@ -17011,7 +16597,7 @@
           <a:bodyPr wrap="square" rtlCol="0" anchor="ctr"/>
           <a:lstStyle/>
           <a:p>
-            <a:pPr indent="0" marL="0">
+            <a:pPr marL="0" indent="0">
               <a:buNone/>
             </a:pPr>
             <a:r>
@@ -17056,15 +16642,15 @@
       </p:sp>
       <p:pic>
         <p:nvPicPr>
-          <p:cNvPr id="7" name="Image 0" descr="c:\Users\patel\OneDrive - Dalhousie University\Desktop\Classwork\Sem 2\Adv Cloud\Project\docxs\diagrams\sequence-registration.png">    </p:cNvPr>
+          <p:cNvPr id="7" name="Image 0" descr="c:\Users\patel\OneDrive - Dalhousie University\Desktop\Classwork\Sem 2\Adv Cloud\Project\docxs\diagrams\sequence-registration.png"/>
           <p:cNvPicPr>
             <a:picLocks noChangeAspect="1"/>
           </p:cNvPicPr>
           <p:nvPr/>
         </p:nvPicPr>
         <p:blipFill>
-          <a:blip r:embed="rId1"/>
-          <a:srcRect l="0" r="0" t="0" b="0"/>
+          <a:blip r:embed="rId3"/>
+          <a:srcRect/>
           <a:stretch/>
         </p:blipFill>
         <p:spPr>
@@ -17098,7 +16684,7 @@
           <a:bodyPr wrap="square" rtlCol="0" anchor="t"/>
           <a:lstStyle/>
           <a:p>
-            <a:pPr indent="0" marL="0">
+            <a:pPr marL="0" indent="0">
               <a:lnSpc>
                 <a:spcPct val="105000"/>
               </a:lnSpc>
@@ -17146,15 +16732,15 @@
       </p:sp>
       <p:pic>
         <p:nvPicPr>
-          <p:cNvPr id="10" name="Image 1" descr="c:\Users\patel\OneDrive - Dalhousie University\Desktop\Classwork\Sem 2\Adv Cloud\Project\docxs\diagrams\sequence-job-posting.png">    </p:cNvPr>
+          <p:cNvPr id="10" name="Image 1" descr="c:\Users\patel\OneDrive - Dalhousie University\Desktop\Classwork\Sem 2\Adv Cloud\Project\docxs\diagrams\sequence-job-posting.png"/>
           <p:cNvPicPr>
             <a:picLocks noChangeAspect="1"/>
           </p:cNvPicPr>
           <p:nvPr/>
         </p:nvPicPr>
         <p:blipFill>
-          <a:blip r:embed="rId2"/>
-          <a:srcRect l="0" r="0" t="0" b="0"/>
+          <a:blip r:embed="rId4"/>
+          <a:srcRect/>
           <a:stretch/>
         </p:blipFill>
         <p:spPr>
@@ -17188,7 +16774,7 @@
           <a:bodyPr wrap="square" rtlCol="0" anchor="t"/>
           <a:lstStyle/>
           <a:p>
-            <a:pPr indent="0" marL="0">
+            <a:pPr marL="0" indent="0">
               <a:lnSpc>
                 <a:spcPct val="105000"/>
               </a:lnSpc>
@@ -17236,15 +16822,15 @@
       </p:sp>
       <p:pic>
         <p:nvPicPr>
-          <p:cNvPr id="13" name="Image 2" descr="c:\Users\patel\OneDrive - Dalhousie University\Desktop\Classwork\Sem 2\Adv Cloud\Project\docxs\diagrams\sequence-download.png">    </p:cNvPr>
+          <p:cNvPr id="13" name="Image 2" descr="c:\Users\patel\OneDrive - Dalhousie University\Desktop\Classwork\Sem 2\Adv Cloud\Project\docxs\diagrams\sequence-download.png"/>
           <p:cNvPicPr>
             <a:picLocks noChangeAspect="1"/>
           </p:cNvPicPr>
           <p:nvPr/>
         </p:nvPicPr>
         <p:blipFill>
-          <a:blip r:embed="rId3"/>
-          <a:srcRect l="0" r="0" t="0" b="0"/>
+          <a:blip r:embed="rId5"/>
+          <a:srcRect/>
           <a:stretch/>
         </p:blipFill>
         <p:spPr>
@@ -17278,7 +16864,7 @@
           <a:bodyPr wrap="square" rtlCol="0" anchor="t"/>
           <a:lstStyle/>
           <a:p>
-            <a:pPr indent="0" marL="0">
+            <a:pPr marL="0" indent="0">
               <a:lnSpc>
                 <a:spcPct val="105000"/>
               </a:lnSpc>
@@ -17326,15 +16912,15 @@
       </p:sp>
       <p:pic>
         <p:nvPicPr>
-          <p:cNvPr id="16" name="Image 3" descr="c:\Users\patel\OneDrive - Dalhousie University\Desktop\Classwork\Sem 2\Adv Cloud\Project\docxs\diagrams\sequence-refresh.png">    </p:cNvPr>
+          <p:cNvPr id="16" name="Image 3" descr="c:\Users\patel\OneDrive - Dalhousie University\Desktop\Classwork\Sem 2\Adv Cloud\Project\docxs\diagrams\sequence-refresh.png"/>
           <p:cNvPicPr>
             <a:picLocks noChangeAspect="1"/>
           </p:cNvPicPr>
           <p:nvPr/>
         </p:nvPicPr>
         <p:blipFill>
-          <a:blip r:embed="rId4"/>
-          <a:srcRect l="0" r="0" t="0" b="0"/>
+          <a:blip r:embed="rId6"/>
+          <a:srcRect/>
           <a:stretch/>
         </p:blipFill>
         <p:spPr>
@@ -17368,7 +16954,7 @@
           <a:bodyPr wrap="square" rtlCol="0" anchor="t"/>
           <a:lstStyle/>
           <a:p>
-            <a:pPr indent="0" marL="0">
+            <a:pPr marL="0" indent="0">
               <a:lnSpc>
                 <a:spcPct val="105000"/>
               </a:lnSpc>
@@ -17410,7 +16996,7 @@
           <a:bodyPr wrap="square" rtlCol="0" anchor="ctr"/>
           <a:lstStyle/>
           <a:p>
-            <a:pPr indent="0" marL="0">
+            <a:pPr marL="0" indent="0">
               <a:buNone/>
             </a:pPr>
             <a:r>
@@ -17449,7 +17035,7 @@
           <a:bodyPr wrap="square" rtlCol="0" anchor="ctr"/>
           <a:lstStyle/>
           <a:p>
-            <a:pPr algn="r" indent="0" marL="0">
+            <a:pPr marL="0" indent="0" algn="r">
               <a:buNone/>
             </a:pPr>
             <a:r>
@@ -17768,4 +17354,299 @@
     </a:ext>
   </a:extLst>
 </a:theme>
+</file>
+
+<file path=ppt/theme/theme2.xml><?xml version="1.0" encoding="utf-8"?>
+<a:theme xmlns:a="http://schemas.openxmlformats.org/drawingml/2006/main" name="Office Theme">
+  <a:themeElements>
+    <a:clrScheme name="Office">
+      <a:dk1>
+        <a:sysClr val="windowText" lastClr="000000"/>
+      </a:dk1>
+      <a:lt1>
+        <a:sysClr val="window" lastClr="FFFFFF"/>
+      </a:lt1>
+      <a:dk2>
+        <a:srgbClr val="44546A"/>
+      </a:dk2>
+      <a:lt2>
+        <a:srgbClr val="E7E6E6"/>
+      </a:lt2>
+      <a:accent1>
+        <a:srgbClr val="4472C4"/>
+      </a:accent1>
+      <a:accent2>
+        <a:srgbClr val="ED7D31"/>
+      </a:accent2>
+      <a:accent3>
+        <a:srgbClr val="A5A5A5"/>
+      </a:accent3>
+      <a:accent4>
+        <a:srgbClr val="FFC000"/>
+      </a:accent4>
+      <a:accent5>
+        <a:srgbClr val="5B9BD5"/>
+      </a:accent5>
+      <a:accent6>
+        <a:srgbClr val="70AD47"/>
+      </a:accent6>
+      <a:hlink>
+        <a:srgbClr val="0563C1"/>
+      </a:hlink>
+      <a:folHlink>
+        <a:srgbClr val="954F72"/>
+      </a:folHlink>
+    </a:clrScheme>
+    <a:fontScheme name="Office">
+      <a:majorFont>
+        <a:latin typeface="Calibri Light" panose="020F0302020204030204"/>
+        <a:ea typeface=""/>
+        <a:cs typeface=""/>
+        <a:font script="Jpan" typeface="游ゴシック Light"/>
+        <a:font script="Hang" typeface="맑은 고딕"/>
+        <a:font script="Hans" typeface="等线 Light"/>
+        <a:font script="Hant" typeface="新細明體"/>
+        <a:font script="Arab" typeface="Times New Roman"/>
+        <a:font script="Hebr" typeface="Times New Roman"/>
+        <a:font script="Thai" typeface="Angsana New"/>
+        <a:font script="Ethi" typeface="Nyala"/>
+        <a:font script="Beng" typeface="Vrinda"/>
+        <a:font script="Gujr" typeface="Shruti"/>
+        <a:font script="Khmr" typeface="MoolBoran"/>
+        <a:font script="Knda" typeface="Tunga"/>
+        <a:font script="Guru" typeface="Raavi"/>
+        <a:font script="Cans" typeface="Euphemia"/>
+        <a:font script="Cher" typeface="Plantagenet Cherokee"/>
+        <a:font script="Yiii" typeface="Microsoft Yi Baiti"/>
+        <a:font script="Tibt" typeface="Microsoft Himalaya"/>
+        <a:font script="Thaa" typeface="MV Boli"/>
+        <a:font script="Deva" typeface="Mangal"/>
+        <a:font script="Telu" typeface="Gautami"/>
+        <a:font script="Taml" typeface="Latha"/>
+        <a:font script="Syrc" typeface="Estrangelo Edessa"/>
+        <a:font script="Orya" typeface="Kalinga"/>
+        <a:font script="Mlym" typeface="Kartika"/>
+        <a:font script="Laoo" typeface="DokChampa"/>
+        <a:font script="Sinh" typeface="Iskoola Pota"/>
+        <a:font script="Mong" typeface="Mongolian Baiti"/>
+        <a:font script="Viet" typeface="Times New Roman"/>
+        <a:font script="Uigh" typeface="Microsoft Uighur"/>
+        <a:font script="Geor" typeface="Sylfaen"/>
+        <a:font script="Armn" typeface="Arial"/>
+        <a:font script="Bugi" typeface="Leelawadee UI"/>
+        <a:font script="Bopo" typeface="Microsoft JhengHei"/>
+        <a:font script="Java" typeface="Javanese Text"/>
+        <a:font script="Lisu" typeface="Segoe UI"/>
+        <a:font script="Mymr" typeface="Myanmar Text"/>
+        <a:font script="Nkoo" typeface="Ebrima"/>
+        <a:font script="Olck" typeface="Nirmala UI"/>
+        <a:font script="Osma" typeface="Ebrima"/>
+        <a:font script="Phag" typeface="Phagspa"/>
+        <a:font script="Syrn" typeface="Estrangelo Edessa"/>
+        <a:font script="Syrj" typeface="Estrangelo Edessa"/>
+        <a:font script="Syre" typeface="Estrangelo Edessa"/>
+        <a:font script="Sora" typeface="Nirmala UI"/>
+        <a:font script="Tale" typeface="Microsoft Tai Le"/>
+        <a:font script="Talu" typeface="Microsoft New Tai Lue"/>
+        <a:font script="Tfng" typeface="Ebrima"/>
+      </a:majorFont>
+      <a:minorFont>
+        <a:latin typeface="Calibri" panose="020F0502020204030204"/>
+        <a:ea typeface=""/>
+        <a:cs typeface=""/>
+        <a:font script="Jpan" typeface="游ゴシック"/>
+        <a:font script="Hang" typeface="맑은 고딕"/>
+        <a:font script="Hans" typeface="等线"/>
+        <a:font script="Hant" typeface="新細明體"/>
+        <a:font script="Arab" typeface="Arial"/>
+        <a:font script="Hebr" typeface="Arial"/>
+        <a:font script="Thai" typeface="Cordia New"/>
+        <a:font script="Ethi" typeface="Nyala"/>
+        <a:font script="Beng" typeface="Vrinda"/>
+        <a:font script="Gujr" typeface="Shruti"/>
+        <a:font script="Khmr" typeface="DaunPenh"/>
+        <a:font script="Knda" typeface="Tunga"/>
+        <a:font script="Guru" typeface="Raavi"/>
+        <a:font script="Cans" typeface="Euphemia"/>
+        <a:font script="Cher" typeface="Plantagenet Cherokee"/>
+        <a:font script="Yiii" typeface="Microsoft Yi Baiti"/>
+        <a:font script="Tibt" typeface="Microsoft Himalaya"/>
+        <a:font script="Thaa" typeface="MV Boli"/>
+        <a:font script="Deva" typeface="Mangal"/>
+        <a:font script="Telu" typeface="Gautami"/>
+        <a:font script="Taml" typeface="Latha"/>
+        <a:font script="Syrc" typeface="Estrangelo Edessa"/>
+        <a:font script="Orya" typeface="Kalinga"/>
+        <a:font script="Mlym" typeface="Kartika"/>
+        <a:font script="Laoo" typeface="DokChampa"/>
+        <a:font script="Sinh" typeface="Iskoola Pota"/>
+        <a:font script="Mong" typeface="Mongolian Baiti"/>
+        <a:font script="Viet" typeface="Arial"/>
+        <a:font script="Uigh" typeface="Microsoft Uighur"/>
+        <a:font script="Geor" typeface="Sylfaen"/>
+        <a:font script="Armn" typeface="Arial"/>
+        <a:font script="Bugi" typeface="Leelawadee UI"/>
+        <a:font script="Bopo" typeface="Microsoft JhengHei"/>
+        <a:font script="Java" typeface="Javanese Text"/>
+        <a:font script="Lisu" typeface="Segoe UI"/>
+        <a:font script="Mymr" typeface="Myanmar Text"/>
+        <a:font script="Nkoo" typeface="Ebrima"/>
+        <a:font script="Olck" typeface="Nirmala UI"/>
+        <a:font script="Osma" typeface="Ebrima"/>
+        <a:font script="Phag" typeface="Phagspa"/>
+        <a:font script="Syrn" typeface="Estrangelo Edessa"/>
+        <a:font script="Syrj" typeface="Estrangelo Edessa"/>
+        <a:font script="Syre" typeface="Estrangelo Edessa"/>
+        <a:font script="Sora" typeface="Nirmala UI"/>
+        <a:font script="Tale" typeface="Microsoft Tai Le"/>
+        <a:font script="Talu" typeface="Microsoft New Tai Lue"/>
+        <a:font script="Tfng" typeface="Ebrima"/>
+      </a:minorFont>
+    </a:fontScheme>
+    <a:fmtScheme name="Office">
+      <a:fillStyleLst>
+        <a:solidFill>
+          <a:schemeClr val="phClr"/>
+        </a:solidFill>
+        <a:gradFill rotWithShape="1">
+          <a:gsLst>
+            <a:gs pos="0">
+              <a:schemeClr val="phClr">
+                <a:lumMod val="110000"/>
+                <a:satMod val="105000"/>
+                <a:tint val="67000"/>
+              </a:schemeClr>
+            </a:gs>
+            <a:gs pos="50000">
+              <a:schemeClr val="phClr">
+                <a:lumMod val="105000"/>
+                <a:satMod val="103000"/>
+                <a:tint val="73000"/>
+              </a:schemeClr>
+            </a:gs>
+            <a:gs pos="100000">
+              <a:schemeClr val="phClr">
+                <a:lumMod val="105000"/>
+                <a:satMod val="109000"/>
+                <a:tint val="81000"/>
+              </a:schemeClr>
+            </a:gs>
+          </a:gsLst>
+          <a:lin ang="5400000" scaled="0"/>
+        </a:gradFill>
+        <a:gradFill rotWithShape="1">
+          <a:gsLst>
+            <a:gs pos="0">
+              <a:schemeClr val="phClr">
+                <a:satMod val="103000"/>
+                <a:lumMod val="102000"/>
+                <a:tint val="94000"/>
+              </a:schemeClr>
+            </a:gs>
+            <a:gs pos="50000">
+              <a:schemeClr val="phClr">
+                <a:satMod val="110000"/>
+                <a:lumMod val="100000"/>
+                <a:shade val="100000"/>
+              </a:schemeClr>
+            </a:gs>
+            <a:gs pos="100000">
+              <a:schemeClr val="phClr">
+                <a:lumMod val="99000"/>
+                <a:satMod val="120000"/>
+                <a:shade val="78000"/>
+              </a:schemeClr>
+            </a:gs>
+          </a:gsLst>
+          <a:lin ang="5400000" scaled="0"/>
+        </a:gradFill>
+      </a:fillStyleLst>
+      <a:lnStyleLst>
+        <a:ln w="6350" cap="flat" cmpd="sng" algn="ctr">
+          <a:solidFill>
+            <a:schemeClr val="phClr"/>
+          </a:solidFill>
+          <a:prstDash val="solid"/>
+          <a:miter lim="800000"/>
+        </a:ln>
+        <a:ln w="12700" cap="flat" cmpd="sng" algn="ctr">
+          <a:solidFill>
+            <a:schemeClr val="phClr"/>
+          </a:solidFill>
+          <a:prstDash val="solid"/>
+          <a:miter lim="800000"/>
+        </a:ln>
+        <a:ln w="19050" cap="flat" cmpd="sng" algn="ctr">
+          <a:solidFill>
+            <a:schemeClr val="phClr"/>
+          </a:solidFill>
+          <a:prstDash val="solid"/>
+          <a:miter lim="800000"/>
+        </a:ln>
+      </a:lnStyleLst>
+      <a:effectStyleLst>
+        <a:effectStyle>
+          <a:effectLst/>
+        </a:effectStyle>
+        <a:effectStyle>
+          <a:effectLst/>
+        </a:effectStyle>
+        <a:effectStyle>
+          <a:effectLst>
+            <a:outerShdw blurRad="57150" dist="19050" dir="5400000" algn="ctr" rotWithShape="0">
+              <a:srgbClr val="000000">
+                <a:alpha val="63000"/>
+              </a:srgbClr>
+            </a:outerShdw>
+          </a:effectLst>
+        </a:effectStyle>
+      </a:effectStyleLst>
+      <a:bgFillStyleLst>
+        <a:solidFill>
+          <a:schemeClr val="phClr"/>
+        </a:solidFill>
+        <a:solidFill>
+          <a:schemeClr val="phClr">
+            <a:tint val="95000"/>
+            <a:satMod val="170000"/>
+          </a:schemeClr>
+        </a:solidFill>
+        <a:gradFill rotWithShape="1">
+          <a:gsLst>
+            <a:gs pos="0">
+              <a:schemeClr val="phClr">
+                <a:tint val="93000"/>
+                <a:satMod val="150000"/>
+                <a:shade val="98000"/>
+                <a:lumMod val="102000"/>
+              </a:schemeClr>
+            </a:gs>
+            <a:gs pos="50000">
+              <a:schemeClr val="phClr">
+                <a:tint val="98000"/>
+                <a:satMod val="130000"/>
+                <a:shade val="90000"/>
+                <a:lumMod val="103000"/>
+              </a:schemeClr>
+            </a:gs>
+            <a:gs pos="100000">
+              <a:schemeClr val="phClr">
+                <a:shade val="63000"/>
+                <a:satMod val="120000"/>
+              </a:schemeClr>
+            </a:gs>
+          </a:gsLst>
+          <a:lin ang="5400000" scaled="0"/>
+        </a:gradFill>
+      </a:bgFillStyleLst>
+    </a:fmtScheme>
+  </a:themeElements>
+  <a:objectDefaults/>
+  <a:extraClrSchemeLst/>
+  <a:extLst>
+    <a:ext uri="{05A4C25C-085E-4340-85A3-A5531E510DB2}">
+      <thm15:themeFamily xmlns:thm15="http://schemas.microsoft.com/office/thememl/2012/main" name="Office Theme" id="{62F939B6-93AF-4DB8-9C6B-D6C7DFDC589F}" vid="{4A3C46E8-61CC-4603-A589-7422A47A8E4A}"/>
+    </a:ext>
+  </a:extLst>
+</a:theme>
 </file>